--- a/docs/pptx/auc3/ritu-auc3-linsubhr-egfrdisc-anemia2.pptx
+++ b/docs/pptx/auc3/ritu-auc3-linsubhr-egfrdisc-anemia2.pptx
@@ -2443,7 +2443,7 @@
           </p:nvSpPr>
           <p:spPr>
             <a:xfrm>
-              <a:off x="2040316" y="2073503"/>
+              <a:off x="2044638" y="2073503"/>
               <a:ext cx="0" cy="3649639"/>
             </a:xfrm>
             <a:custGeom>
@@ -2486,7 +2486,7 @@
           </p:nvSpPr>
           <p:spPr>
             <a:xfrm>
-              <a:off x="4520982" y="2073503"/>
+              <a:off x="4520586" y="2073503"/>
               <a:ext cx="0" cy="3649639"/>
             </a:xfrm>
             <a:custGeom>
@@ -2529,7 +2529,7 @@
           </p:nvSpPr>
           <p:spPr>
             <a:xfrm>
-              <a:off x="7001648" y="2073503"/>
+              <a:off x="6996534" y="2073503"/>
               <a:ext cx="0" cy="3649639"/>
             </a:xfrm>
             <a:custGeom>
@@ -2787,7 +2787,7 @@
           </p:nvSpPr>
           <p:spPr>
             <a:xfrm>
-              <a:off x="3280649" y="2073503"/>
+              <a:off x="3282612" y="2073503"/>
               <a:ext cx="0" cy="3649639"/>
             </a:xfrm>
             <a:custGeom>
@@ -2830,7 +2830,7 @@
           </p:nvSpPr>
           <p:spPr>
             <a:xfrm>
-              <a:off x="5761315" y="2073503"/>
+              <a:off x="5758560" y="2073503"/>
               <a:ext cx="0" cy="3649639"/>
             </a:xfrm>
             <a:custGeom>
@@ -2873,7 +2873,7 @@
           </p:nvSpPr>
           <p:spPr>
             <a:xfrm>
-              <a:off x="8241981" y="2073503"/>
+              <a:off x="8234508" y="2073503"/>
               <a:ext cx="0" cy="3649639"/>
             </a:xfrm>
             <a:custGeom>
@@ -2916,612 +2916,612 @@
           </p:nvSpPr>
           <p:spPr>
             <a:xfrm>
-              <a:off x="1172049" y="3495295"/>
-              <a:ext cx="7090630" cy="1811396"/>
+              <a:off x="1172049" y="3361500"/>
+              <a:ext cx="7090630" cy="1932157"/>
             </a:xfrm>
             <a:custGeom>
               <a:avLst/>
               <a:pathLst>
-                <a:path w="7090630" h="1811396">
+                <a:path w="7090630" h="1932157">
                   <a:moveTo>
                     <a:pt x="0" y="0"/>
                   </a:moveTo>
                   <a:lnTo>
-                    <a:pt x="71622" y="29127"/>
-                  </a:lnTo>
-                  <a:lnTo>
-                    <a:pt x="143245" y="57843"/>
-                  </a:lnTo>
-                  <a:lnTo>
-                    <a:pt x="214867" y="86153"/>
-                  </a:lnTo>
-                  <a:lnTo>
-                    <a:pt x="286490" y="114064"/>
-                  </a:lnTo>
-                  <a:lnTo>
-                    <a:pt x="358112" y="141580"/>
-                  </a:lnTo>
-                  <a:lnTo>
-                    <a:pt x="429735" y="168707"/>
-                  </a:lnTo>
-                  <a:lnTo>
-                    <a:pt x="501357" y="195452"/>
-                  </a:lnTo>
-                  <a:lnTo>
-                    <a:pt x="572980" y="221818"/>
-                  </a:lnTo>
-                  <a:lnTo>
-                    <a:pt x="644602" y="247812"/>
-                  </a:lnTo>
-                  <a:lnTo>
-                    <a:pt x="716225" y="273439"/>
-                  </a:lnTo>
-                  <a:lnTo>
-                    <a:pt x="787847" y="298704"/>
-                  </a:lnTo>
-                  <a:lnTo>
-                    <a:pt x="859470" y="323612"/>
-                  </a:lnTo>
-                  <a:lnTo>
-                    <a:pt x="931092" y="348168"/>
-                  </a:lnTo>
-                  <a:lnTo>
-                    <a:pt x="1002715" y="372377"/>
-                  </a:lnTo>
-                  <a:lnTo>
-                    <a:pt x="1074337" y="396244"/>
-                  </a:lnTo>
-                  <a:lnTo>
-                    <a:pt x="1145960" y="419774"/>
-                  </a:lnTo>
-                  <a:lnTo>
-                    <a:pt x="1217582" y="442972"/>
-                  </a:lnTo>
-                  <a:lnTo>
-                    <a:pt x="1289205" y="465842"/>
-                  </a:lnTo>
-                  <a:lnTo>
-                    <a:pt x="1360827" y="488389"/>
-                  </a:lnTo>
-                  <a:lnTo>
-                    <a:pt x="1432450" y="510617"/>
-                  </a:lnTo>
-                  <a:lnTo>
-                    <a:pt x="1504073" y="532531"/>
-                  </a:lnTo>
-                  <a:lnTo>
-                    <a:pt x="1575695" y="554136"/>
-                  </a:lnTo>
-                  <a:lnTo>
-                    <a:pt x="1647318" y="575436"/>
-                  </a:lnTo>
-                  <a:lnTo>
-                    <a:pt x="1718940" y="596435"/>
-                  </a:lnTo>
-                  <a:lnTo>
-                    <a:pt x="1790563" y="617137"/>
-                  </a:lnTo>
-                  <a:lnTo>
-                    <a:pt x="1862185" y="637547"/>
-                  </a:lnTo>
-                  <a:lnTo>
-                    <a:pt x="1933808" y="657668"/>
-                  </a:lnTo>
-                  <a:lnTo>
-                    <a:pt x="2005430" y="677505"/>
-                  </a:lnTo>
-                  <a:lnTo>
-                    <a:pt x="2077053" y="697062"/>
-                  </a:lnTo>
-                  <a:lnTo>
-                    <a:pt x="2148675" y="716343"/>
-                  </a:lnTo>
-                  <a:lnTo>
-                    <a:pt x="2220298" y="735351"/>
-                  </a:lnTo>
-                  <a:lnTo>
-                    <a:pt x="2291920" y="754091"/>
-                  </a:lnTo>
-                  <a:lnTo>
-                    <a:pt x="2363543" y="772566"/>
-                  </a:lnTo>
-                  <a:lnTo>
-                    <a:pt x="2435165" y="790780"/>
-                  </a:lnTo>
-                  <a:lnTo>
-                    <a:pt x="2506788" y="808737"/>
-                  </a:lnTo>
-                  <a:lnTo>
-                    <a:pt x="2578410" y="826440"/>
-                  </a:lnTo>
-                  <a:lnTo>
-                    <a:pt x="2650033" y="843893"/>
-                  </a:lnTo>
-                  <a:lnTo>
-                    <a:pt x="2721655" y="861099"/>
-                  </a:lnTo>
-                  <a:lnTo>
-                    <a:pt x="2793278" y="878063"/>
-                  </a:lnTo>
-                  <a:lnTo>
-                    <a:pt x="2864901" y="894787"/>
-                  </a:lnTo>
-                  <a:lnTo>
-                    <a:pt x="2936523" y="911274"/>
-                  </a:lnTo>
-                  <a:lnTo>
-                    <a:pt x="3008146" y="927529"/>
-                  </a:lnTo>
-                  <a:lnTo>
-                    <a:pt x="3079768" y="943554"/>
-                  </a:lnTo>
-                  <a:lnTo>
-                    <a:pt x="3151391" y="959352"/>
-                  </a:lnTo>
-                  <a:lnTo>
-                    <a:pt x="3223013" y="974928"/>
-                  </a:lnTo>
-                  <a:lnTo>
-                    <a:pt x="3294636" y="990283"/>
-                  </a:lnTo>
-                  <a:lnTo>
-                    <a:pt x="3366258" y="1005422"/>
-                  </a:lnTo>
-                  <a:lnTo>
-                    <a:pt x="3437881" y="1020347"/>
-                  </a:lnTo>
-                  <a:lnTo>
-                    <a:pt x="3509503" y="1035061"/>
-                  </a:lnTo>
-                  <a:lnTo>
-                    <a:pt x="3581126" y="1049567"/>
-                  </a:lnTo>
-                  <a:lnTo>
-                    <a:pt x="3652748" y="1063868"/>
-                  </a:lnTo>
-                  <a:lnTo>
-                    <a:pt x="3724371" y="1077967"/>
-                  </a:lnTo>
-                  <a:lnTo>
-                    <a:pt x="3795993" y="1091867"/>
-                  </a:lnTo>
-                  <a:lnTo>
-                    <a:pt x="3867616" y="1105570"/>
-                  </a:lnTo>
-                  <a:lnTo>
-                    <a:pt x="3939238" y="1119080"/>
-                  </a:lnTo>
-                  <a:lnTo>
-                    <a:pt x="4010861" y="1132400"/>
-                  </a:lnTo>
-                  <a:lnTo>
-                    <a:pt x="4082483" y="1145531"/>
-                  </a:lnTo>
-                  <a:lnTo>
-                    <a:pt x="4154106" y="1158476"/>
-                  </a:lnTo>
-                  <a:lnTo>
-                    <a:pt x="4225729" y="1171239"/>
-                  </a:lnTo>
-                  <a:lnTo>
-                    <a:pt x="4297351" y="1183821"/>
-                  </a:lnTo>
-                  <a:lnTo>
-                    <a:pt x="4368974" y="1196226"/>
-                  </a:lnTo>
-                  <a:lnTo>
-                    <a:pt x="4440596" y="1208455"/>
-                  </a:lnTo>
-                  <a:lnTo>
-                    <a:pt x="4512219" y="1220512"/>
-                  </a:lnTo>
-                  <a:lnTo>
-                    <a:pt x="4583841" y="1232398"/>
-                  </a:lnTo>
-                  <a:lnTo>
-                    <a:pt x="4655464" y="1216954"/>
-                  </a:lnTo>
-                  <a:lnTo>
-                    <a:pt x="4727086" y="1201002"/>
-                  </a:lnTo>
-                  <a:lnTo>
-                    <a:pt x="4798709" y="1184749"/>
-                  </a:lnTo>
-                  <a:lnTo>
-                    <a:pt x="4870331" y="1168189"/>
-                  </a:lnTo>
-                  <a:lnTo>
-                    <a:pt x="4941954" y="1151316"/>
-                  </a:lnTo>
-                  <a:lnTo>
-                    <a:pt x="5013576" y="1134125"/>
-                  </a:lnTo>
-                  <a:lnTo>
-                    <a:pt x="5085199" y="1116609"/>
-                  </a:lnTo>
-                  <a:lnTo>
-                    <a:pt x="5156821" y="1098762"/>
-                  </a:lnTo>
-                  <a:lnTo>
-                    <a:pt x="5228444" y="1080579"/>
-                  </a:lnTo>
-                  <a:lnTo>
-                    <a:pt x="5300066" y="1062052"/>
-                  </a:lnTo>
-                  <a:lnTo>
-                    <a:pt x="5371689" y="1043176"/>
-                  </a:lnTo>
-                  <a:lnTo>
-                    <a:pt x="5443311" y="1023943"/>
-                  </a:lnTo>
-                  <a:lnTo>
-                    <a:pt x="5514934" y="1004347"/>
-                  </a:lnTo>
-                  <a:lnTo>
-                    <a:pt x="5586557" y="984381"/>
-                  </a:lnTo>
-                  <a:lnTo>
-                    <a:pt x="5658179" y="964039"/>
-                  </a:lnTo>
-                  <a:lnTo>
-                    <a:pt x="5729802" y="943312"/>
-                  </a:lnTo>
-                  <a:lnTo>
-                    <a:pt x="5801424" y="922194"/>
-                  </a:lnTo>
-                  <a:lnTo>
-                    <a:pt x="5873047" y="900677"/>
-                  </a:lnTo>
-                  <a:lnTo>
-                    <a:pt x="5944669" y="878754"/>
-                  </a:lnTo>
-                  <a:lnTo>
-                    <a:pt x="6016292" y="856418"/>
-                  </a:lnTo>
-                  <a:lnTo>
-                    <a:pt x="6087914" y="833659"/>
-                  </a:lnTo>
-                  <a:lnTo>
-                    <a:pt x="6159537" y="810471"/>
-                  </a:lnTo>
-                  <a:lnTo>
-                    <a:pt x="6231159" y="786845"/>
-                  </a:lnTo>
-                  <a:lnTo>
-                    <a:pt x="6302782" y="762773"/>
-                  </a:lnTo>
-                  <a:lnTo>
-                    <a:pt x="6374404" y="738247"/>
-                  </a:lnTo>
-                  <a:lnTo>
-                    <a:pt x="6446027" y="713258"/>
-                  </a:lnTo>
-                  <a:lnTo>
-                    <a:pt x="6517649" y="687797"/>
-                  </a:lnTo>
-                  <a:lnTo>
-                    <a:pt x="6589272" y="661855"/>
-                  </a:lnTo>
-                  <a:lnTo>
-                    <a:pt x="6660894" y="635424"/>
-                  </a:lnTo>
-                  <a:lnTo>
-                    <a:pt x="6732517" y="608493"/>
-                  </a:lnTo>
-                  <a:lnTo>
-                    <a:pt x="6804139" y="581054"/>
-                  </a:lnTo>
-                  <a:lnTo>
-                    <a:pt x="6875762" y="553098"/>
-                  </a:lnTo>
-                  <a:lnTo>
-                    <a:pt x="6947385" y="524613"/>
-                  </a:lnTo>
-                  <a:lnTo>
-                    <a:pt x="7019007" y="495591"/>
-                  </a:lnTo>
-                  <a:lnTo>
-                    <a:pt x="7090630" y="466020"/>
-                  </a:lnTo>
-                  <a:lnTo>
-                    <a:pt x="7090630" y="1557765"/>
-                  </a:lnTo>
-                  <a:lnTo>
-                    <a:pt x="7019007" y="1550541"/>
-                  </a:lnTo>
-                  <a:lnTo>
-                    <a:pt x="6947385" y="1543213"/>
-                  </a:lnTo>
-                  <a:lnTo>
-                    <a:pt x="6875762" y="1535780"/>
-                  </a:lnTo>
-                  <a:lnTo>
-                    <a:pt x="6804139" y="1528241"/>
-                  </a:lnTo>
-                  <a:lnTo>
-                    <a:pt x="6732517" y="1520594"/>
-                  </a:lnTo>
-                  <a:lnTo>
-                    <a:pt x="6660894" y="1512837"/>
-                  </a:lnTo>
-                  <a:lnTo>
-                    <a:pt x="6589272" y="1504969"/>
-                  </a:lnTo>
-                  <a:lnTo>
-                    <a:pt x="6517649" y="1496988"/>
-                  </a:lnTo>
-                  <a:lnTo>
-                    <a:pt x="6446027" y="1488893"/>
-                  </a:lnTo>
-                  <a:lnTo>
-                    <a:pt x="6374404" y="1480682"/>
-                  </a:lnTo>
-                  <a:lnTo>
-                    <a:pt x="6302782" y="1472353"/>
-                  </a:lnTo>
-                  <a:lnTo>
-                    <a:pt x="6231159" y="1463905"/>
-                  </a:lnTo>
-                  <a:lnTo>
-                    <a:pt x="6159537" y="1455336"/>
-                  </a:lnTo>
-                  <a:lnTo>
-                    <a:pt x="6087914" y="1446644"/>
-                  </a:lnTo>
-                  <a:lnTo>
-                    <a:pt x="6016292" y="1437827"/>
-                  </a:lnTo>
-                  <a:lnTo>
-                    <a:pt x="5944669" y="1428884"/>
-                  </a:lnTo>
-                  <a:lnTo>
-                    <a:pt x="5873047" y="1419813"/>
-                  </a:lnTo>
-                  <a:lnTo>
-                    <a:pt x="5801424" y="1410613"/>
-                  </a:lnTo>
-                  <a:lnTo>
-                    <a:pt x="5729802" y="1401280"/>
-                  </a:lnTo>
-                  <a:lnTo>
-                    <a:pt x="5658179" y="1391813"/>
-                  </a:lnTo>
-                  <a:lnTo>
-                    <a:pt x="5586557" y="1382211"/>
-                  </a:lnTo>
-                  <a:lnTo>
-                    <a:pt x="5514934" y="1372471"/>
-                  </a:lnTo>
-                  <a:lnTo>
-                    <a:pt x="5443311" y="1362592"/>
-                  </a:lnTo>
-                  <a:lnTo>
-                    <a:pt x="5371689" y="1352571"/>
-                  </a:lnTo>
-                  <a:lnTo>
-                    <a:pt x="5300066" y="1342407"/>
-                  </a:lnTo>
-                  <a:lnTo>
-                    <a:pt x="5228444" y="1332097"/>
-                  </a:lnTo>
-                  <a:lnTo>
-                    <a:pt x="5156821" y="1321639"/>
-                  </a:lnTo>
-                  <a:lnTo>
-                    <a:pt x="5085199" y="1311031"/>
-                  </a:lnTo>
-                  <a:lnTo>
-                    <a:pt x="5013576" y="1300272"/>
-                  </a:lnTo>
-                  <a:lnTo>
-                    <a:pt x="4941954" y="1289358"/>
-                  </a:lnTo>
-                  <a:lnTo>
-                    <a:pt x="4870331" y="1278288"/>
-                  </a:lnTo>
-                  <a:lnTo>
-                    <a:pt x="4798709" y="1267059"/>
-                  </a:lnTo>
-                  <a:lnTo>
-                    <a:pt x="4727086" y="1255669"/>
-                  </a:lnTo>
-                  <a:lnTo>
-                    <a:pt x="4655464" y="1244116"/>
-                  </a:lnTo>
-                  <a:lnTo>
-                    <a:pt x="4583841" y="1232611"/>
-                  </a:lnTo>
-                  <a:lnTo>
-                    <a:pt x="4512219" y="1247977"/>
-                  </a:lnTo>
-                  <a:lnTo>
-                    <a:pt x="4440596" y="1263059"/>
-                  </a:lnTo>
-                  <a:lnTo>
-                    <a:pt x="4368974" y="1277861"/>
-                  </a:lnTo>
-                  <a:lnTo>
-                    <a:pt x="4297351" y="1292389"/>
-                  </a:lnTo>
-                  <a:lnTo>
-                    <a:pt x="4225729" y="1306648"/>
-                  </a:lnTo>
-                  <a:lnTo>
-                    <a:pt x="4154106" y="1320643"/>
-                  </a:lnTo>
-                  <a:lnTo>
-                    <a:pt x="4082483" y="1334378"/>
-                  </a:lnTo>
-                  <a:lnTo>
-                    <a:pt x="4010861" y="1347859"/>
-                  </a:lnTo>
-                  <a:lnTo>
-                    <a:pt x="3939238" y="1361090"/>
-                  </a:lnTo>
-                  <a:lnTo>
-                    <a:pt x="3867616" y="1374076"/>
-                  </a:lnTo>
-                  <a:lnTo>
-                    <a:pt x="3795993" y="1386821"/>
-                  </a:lnTo>
-                  <a:lnTo>
-                    <a:pt x="3724371" y="1399331"/>
-                  </a:lnTo>
-                  <a:lnTo>
-                    <a:pt x="3652748" y="1411608"/>
-                  </a:lnTo>
-                  <a:lnTo>
-                    <a:pt x="3581126" y="1423658"/>
-                  </a:lnTo>
-                  <a:lnTo>
-                    <a:pt x="3509503" y="1435485"/>
-                  </a:lnTo>
-                  <a:lnTo>
-                    <a:pt x="3437881" y="1447092"/>
-                  </a:lnTo>
-                  <a:lnTo>
-                    <a:pt x="3366258" y="1458485"/>
-                  </a:lnTo>
-                  <a:lnTo>
-                    <a:pt x="3294636" y="1469666"/>
-                  </a:lnTo>
-                  <a:lnTo>
-                    <a:pt x="3223013" y="1480640"/>
-                  </a:lnTo>
-                  <a:lnTo>
-                    <a:pt x="3151391" y="1491411"/>
-                  </a:lnTo>
-                  <a:lnTo>
-                    <a:pt x="3079768" y="1501982"/>
-                  </a:lnTo>
-                  <a:lnTo>
-                    <a:pt x="3008146" y="1512358"/>
-                  </a:lnTo>
-                  <a:lnTo>
-                    <a:pt x="2936523" y="1522541"/>
-                  </a:lnTo>
-                  <a:lnTo>
-                    <a:pt x="2864901" y="1532535"/>
-                  </a:lnTo>
-                  <a:lnTo>
-                    <a:pt x="2793278" y="1542345"/>
-                  </a:lnTo>
-                  <a:lnTo>
-                    <a:pt x="2721655" y="1551972"/>
-                  </a:lnTo>
-                  <a:lnTo>
-                    <a:pt x="2650033" y="1561421"/>
-                  </a:lnTo>
-                  <a:lnTo>
-                    <a:pt x="2578410" y="1570696"/>
-                  </a:lnTo>
-                  <a:lnTo>
-                    <a:pt x="2506788" y="1579798"/>
-                  </a:lnTo>
-                  <a:lnTo>
-                    <a:pt x="2435165" y="1588731"/>
-                  </a:lnTo>
-                  <a:lnTo>
-                    <a:pt x="2363543" y="1597500"/>
-                  </a:lnTo>
-                  <a:lnTo>
-                    <a:pt x="2291920" y="1606105"/>
-                  </a:lnTo>
-                  <a:lnTo>
-                    <a:pt x="2220298" y="1614551"/>
-                  </a:lnTo>
-                  <a:lnTo>
-                    <a:pt x="2148675" y="1622841"/>
-                  </a:lnTo>
-                  <a:lnTo>
-                    <a:pt x="2077053" y="1630977"/>
-                  </a:lnTo>
-                  <a:lnTo>
-                    <a:pt x="2005430" y="1638962"/>
-                  </a:lnTo>
-                  <a:lnTo>
-                    <a:pt x="1933808" y="1646800"/>
-                  </a:lnTo>
-                  <a:lnTo>
-                    <a:pt x="1862185" y="1654492"/>
-                  </a:lnTo>
-                  <a:lnTo>
-                    <a:pt x="1790563" y="1662042"/>
-                  </a:lnTo>
-                  <a:lnTo>
-                    <a:pt x="1718940" y="1669451"/>
-                  </a:lnTo>
-                  <a:lnTo>
-                    <a:pt x="1647318" y="1676724"/>
-                  </a:lnTo>
-                  <a:lnTo>
-                    <a:pt x="1575695" y="1683862"/>
-                  </a:lnTo>
-                  <a:lnTo>
-                    <a:pt x="1504073" y="1690867"/>
-                  </a:lnTo>
-                  <a:lnTo>
-                    <a:pt x="1432450" y="1697743"/>
-                  </a:lnTo>
-                  <a:lnTo>
-                    <a:pt x="1360827" y="1704491"/>
-                  </a:lnTo>
-                  <a:lnTo>
-                    <a:pt x="1289205" y="1711114"/>
-                  </a:lnTo>
-                  <a:lnTo>
-                    <a:pt x="1217582" y="1717615"/>
-                  </a:lnTo>
-                  <a:lnTo>
-                    <a:pt x="1145960" y="1723995"/>
-                  </a:lnTo>
-                  <a:lnTo>
-                    <a:pt x="1074337" y="1730257"/>
-                  </a:lnTo>
-                  <a:lnTo>
-                    <a:pt x="1002715" y="1736403"/>
-                  </a:lnTo>
-                  <a:lnTo>
-                    <a:pt x="931092" y="1742435"/>
-                  </a:lnTo>
-                  <a:lnTo>
-                    <a:pt x="859470" y="1748355"/>
-                  </a:lnTo>
-                  <a:lnTo>
-                    <a:pt x="787847" y="1754165"/>
-                  </a:lnTo>
-                  <a:lnTo>
-                    <a:pt x="716225" y="1759868"/>
-                  </a:lnTo>
-                  <a:lnTo>
-                    <a:pt x="644602" y="1765465"/>
-                  </a:lnTo>
-                  <a:lnTo>
-                    <a:pt x="572980" y="1770959"/>
-                  </a:lnTo>
-                  <a:lnTo>
-                    <a:pt x="501357" y="1776350"/>
-                  </a:lnTo>
-                  <a:lnTo>
-                    <a:pt x="429735" y="1781642"/>
-                  </a:lnTo>
-                  <a:lnTo>
-                    <a:pt x="358112" y="1786836"/>
-                  </a:lnTo>
-                  <a:lnTo>
-                    <a:pt x="286490" y="1791934"/>
-                  </a:lnTo>
-                  <a:lnTo>
-                    <a:pt x="214867" y="1796937"/>
-                  </a:lnTo>
-                  <a:lnTo>
-                    <a:pt x="143245" y="1801847"/>
-                  </a:lnTo>
-                  <a:lnTo>
-                    <a:pt x="71622" y="1806666"/>
-                  </a:lnTo>
-                  <a:lnTo>
-                    <a:pt x="0" y="1811396"/>
+                    <a:pt x="71622" y="33122"/>
+                  </a:lnTo>
+                  <a:lnTo>
+                    <a:pt x="143245" y="65745"/>
+                  </a:lnTo>
+                  <a:lnTo>
+                    <a:pt x="214867" y="97875"/>
+                  </a:lnTo>
+                  <a:lnTo>
+                    <a:pt x="286490" y="129521"/>
+                  </a:lnTo>
+                  <a:lnTo>
+                    <a:pt x="358112" y="160690"/>
+                  </a:lnTo>
+                  <a:lnTo>
+                    <a:pt x="429735" y="191388"/>
+                  </a:lnTo>
+                  <a:lnTo>
+                    <a:pt x="501357" y="221624"/>
+                  </a:lnTo>
+                  <a:lnTo>
+                    <a:pt x="572980" y="251403"/>
+                  </a:lnTo>
+                  <a:lnTo>
+                    <a:pt x="644602" y="280733"/>
+                  </a:lnTo>
+                  <a:lnTo>
+                    <a:pt x="716225" y="309621"/>
+                  </a:lnTo>
+                  <a:lnTo>
+                    <a:pt x="787847" y="338072"/>
+                  </a:lnTo>
+                  <a:lnTo>
+                    <a:pt x="859470" y="366095"/>
+                  </a:lnTo>
+                  <a:lnTo>
+                    <a:pt x="931092" y="393695"/>
+                  </a:lnTo>
+                  <a:lnTo>
+                    <a:pt x="1002715" y="420879"/>
+                  </a:lnTo>
+                  <a:lnTo>
+                    <a:pt x="1074337" y="447652"/>
+                  </a:lnTo>
+                  <a:lnTo>
+                    <a:pt x="1145960" y="474022"/>
+                  </a:lnTo>
+                  <a:lnTo>
+                    <a:pt x="1217582" y="499994"/>
+                  </a:lnTo>
+                  <a:lnTo>
+                    <a:pt x="1289205" y="525574"/>
+                  </a:lnTo>
+                  <a:lnTo>
+                    <a:pt x="1360827" y="550768"/>
+                  </a:lnTo>
+                  <a:lnTo>
+                    <a:pt x="1432450" y="575582"/>
+                  </a:lnTo>
+                  <a:lnTo>
+                    <a:pt x="1504073" y="600022"/>
+                  </a:lnTo>
+                  <a:lnTo>
+                    <a:pt x="1575695" y="624093"/>
+                  </a:lnTo>
+                  <a:lnTo>
+                    <a:pt x="1647318" y="647801"/>
+                  </a:lnTo>
+                  <a:lnTo>
+                    <a:pt x="1718940" y="671152"/>
+                  </a:lnTo>
+                  <a:lnTo>
+                    <a:pt x="1790563" y="694150"/>
+                  </a:lnTo>
+                  <a:lnTo>
+                    <a:pt x="1862185" y="716801"/>
+                  </a:lnTo>
+                  <a:lnTo>
+                    <a:pt x="1933808" y="739111"/>
+                  </a:lnTo>
+                  <a:lnTo>
+                    <a:pt x="2005430" y="761084"/>
+                  </a:lnTo>
+                  <a:lnTo>
+                    <a:pt x="2077053" y="782726"/>
+                  </a:lnTo>
+                  <a:lnTo>
+                    <a:pt x="2148675" y="804041"/>
+                  </a:lnTo>
+                  <a:lnTo>
+                    <a:pt x="2220298" y="825034"/>
+                  </a:lnTo>
+                  <a:lnTo>
+                    <a:pt x="2291920" y="845711"/>
+                  </a:lnTo>
+                  <a:lnTo>
+                    <a:pt x="2363543" y="866076"/>
+                  </a:lnTo>
+                  <a:lnTo>
+                    <a:pt x="2435165" y="886134"/>
+                  </a:lnTo>
+                  <a:lnTo>
+                    <a:pt x="2506788" y="905889"/>
+                  </a:lnTo>
+                  <a:lnTo>
+                    <a:pt x="2578410" y="925347"/>
+                  </a:lnTo>
+                  <a:lnTo>
+                    <a:pt x="2650033" y="944510"/>
+                  </a:lnTo>
+                  <a:lnTo>
+                    <a:pt x="2721655" y="963385"/>
+                  </a:lnTo>
+                  <a:lnTo>
+                    <a:pt x="2793278" y="981975"/>
+                  </a:lnTo>
+                  <a:lnTo>
+                    <a:pt x="2864901" y="1000284"/>
+                  </a:lnTo>
+                  <a:lnTo>
+                    <a:pt x="2936523" y="1018318"/>
+                  </a:lnTo>
+                  <a:lnTo>
+                    <a:pt x="3008146" y="1036079"/>
+                  </a:lnTo>
+                  <a:lnTo>
+                    <a:pt x="3079768" y="1053572"/>
+                  </a:lnTo>
+                  <a:lnTo>
+                    <a:pt x="3151391" y="1070802"/>
+                  </a:lnTo>
+                  <a:lnTo>
+                    <a:pt x="3223013" y="1087772"/>
+                  </a:lnTo>
+                  <a:lnTo>
+                    <a:pt x="3294636" y="1104485"/>
+                  </a:lnTo>
+                  <a:lnTo>
+                    <a:pt x="3366258" y="1120947"/>
+                  </a:lnTo>
+                  <a:lnTo>
+                    <a:pt x="3437881" y="1137160"/>
+                  </a:lnTo>
+                  <a:lnTo>
+                    <a:pt x="3509503" y="1153128"/>
+                  </a:lnTo>
+                  <a:lnTo>
+                    <a:pt x="3581126" y="1168856"/>
+                  </a:lnTo>
+                  <a:lnTo>
+                    <a:pt x="3652748" y="1184347"/>
+                  </a:lnTo>
+                  <a:lnTo>
+                    <a:pt x="3724371" y="1199603"/>
+                  </a:lnTo>
+                  <a:lnTo>
+                    <a:pt x="3795993" y="1214630"/>
+                  </a:lnTo>
+                  <a:lnTo>
+                    <a:pt x="3867616" y="1229430"/>
+                  </a:lnTo>
+                  <a:lnTo>
+                    <a:pt x="3939238" y="1244007"/>
+                  </a:lnTo>
+                  <a:lnTo>
+                    <a:pt x="4010861" y="1258363"/>
+                  </a:lnTo>
+                  <a:lnTo>
+                    <a:pt x="4082483" y="1272504"/>
+                  </a:lnTo>
+                  <a:lnTo>
+                    <a:pt x="4154106" y="1286431"/>
+                  </a:lnTo>
+                  <a:lnTo>
+                    <a:pt x="4225729" y="1300148"/>
+                  </a:lnTo>
+                  <a:lnTo>
+                    <a:pt x="4297351" y="1313657"/>
+                  </a:lnTo>
+                  <a:lnTo>
+                    <a:pt x="4368974" y="1326964"/>
+                  </a:lnTo>
+                  <a:lnTo>
+                    <a:pt x="4440596" y="1340069"/>
+                  </a:lnTo>
+                  <a:lnTo>
+                    <a:pt x="4512219" y="1352977"/>
+                  </a:lnTo>
+                  <a:lnTo>
+                    <a:pt x="4583841" y="1365690"/>
+                  </a:lnTo>
+                  <a:lnTo>
+                    <a:pt x="4655464" y="1352018"/>
+                  </a:lnTo>
+                  <a:lnTo>
+                    <a:pt x="4727086" y="1336780"/>
+                  </a:lnTo>
+                  <a:lnTo>
+                    <a:pt x="4798709" y="1321267"/>
+                  </a:lnTo>
+                  <a:lnTo>
+                    <a:pt x="4870331" y="1305474"/>
+                  </a:lnTo>
+                  <a:lnTo>
+                    <a:pt x="4941954" y="1289395"/>
+                  </a:lnTo>
+                  <a:lnTo>
+                    <a:pt x="5013576" y="1273027"/>
+                  </a:lnTo>
+                  <a:lnTo>
+                    <a:pt x="5085199" y="1256362"/>
+                  </a:lnTo>
+                  <a:lnTo>
+                    <a:pt x="5156821" y="1239397"/>
+                  </a:lnTo>
+                  <a:lnTo>
+                    <a:pt x="5228444" y="1222125"/>
+                  </a:lnTo>
+                  <a:lnTo>
+                    <a:pt x="5300066" y="1204541"/>
+                  </a:lnTo>
+                  <a:lnTo>
+                    <a:pt x="5371689" y="1186640"/>
+                  </a:lnTo>
+                  <a:lnTo>
+                    <a:pt x="5443311" y="1168415"/>
+                  </a:lnTo>
+                  <a:lnTo>
+                    <a:pt x="5514934" y="1149862"/>
+                  </a:lnTo>
+                  <a:lnTo>
+                    <a:pt x="5586557" y="1130973"/>
+                  </a:lnTo>
+                  <a:lnTo>
+                    <a:pt x="5658179" y="1111743"/>
+                  </a:lnTo>
+                  <a:lnTo>
+                    <a:pt x="5729802" y="1092166"/>
+                  </a:lnTo>
+                  <a:lnTo>
+                    <a:pt x="5801424" y="1072235"/>
+                  </a:lnTo>
+                  <a:lnTo>
+                    <a:pt x="5873047" y="1051944"/>
+                  </a:lnTo>
+                  <a:lnTo>
+                    <a:pt x="5944669" y="1031287"/>
+                  </a:lnTo>
+                  <a:lnTo>
+                    <a:pt x="6016292" y="1010257"/>
+                  </a:lnTo>
+                  <a:lnTo>
+                    <a:pt x="6087914" y="988846"/>
+                  </a:lnTo>
+                  <a:lnTo>
+                    <a:pt x="6159537" y="967050"/>
+                  </a:lnTo>
+                  <a:lnTo>
+                    <a:pt x="6231159" y="944859"/>
+                  </a:lnTo>
+                  <a:lnTo>
+                    <a:pt x="6302782" y="922268"/>
+                  </a:lnTo>
+                  <a:lnTo>
+                    <a:pt x="6374404" y="899269"/>
+                  </a:lnTo>
+                  <a:lnTo>
+                    <a:pt x="6446027" y="875854"/>
+                  </a:lnTo>
+                  <a:lnTo>
+                    <a:pt x="6517649" y="852017"/>
+                  </a:lnTo>
+                  <a:lnTo>
+                    <a:pt x="6589272" y="827749"/>
+                  </a:lnTo>
+                  <a:lnTo>
+                    <a:pt x="6660894" y="803043"/>
+                  </a:lnTo>
+                  <a:lnTo>
+                    <a:pt x="6732517" y="777891"/>
+                  </a:lnTo>
+                  <a:lnTo>
+                    <a:pt x="6804139" y="752284"/>
+                  </a:lnTo>
+                  <a:lnTo>
+                    <a:pt x="6875762" y="726215"/>
+                  </a:lnTo>
+                  <a:lnTo>
+                    <a:pt x="6947385" y="699675"/>
+                  </a:lnTo>
+                  <a:lnTo>
+                    <a:pt x="7019007" y="672656"/>
+                  </a:lnTo>
+                  <a:lnTo>
+                    <a:pt x="7090630" y="645149"/>
+                  </a:lnTo>
+                  <a:lnTo>
+                    <a:pt x="7090630" y="1708143"/>
+                  </a:lnTo>
+                  <a:lnTo>
+                    <a:pt x="7019007" y="1700675"/>
+                  </a:lnTo>
+                  <a:lnTo>
+                    <a:pt x="6947385" y="1693093"/>
+                  </a:lnTo>
+                  <a:lnTo>
+                    <a:pt x="6875762" y="1685394"/>
+                  </a:lnTo>
+                  <a:lnTo>
+                    <a:pt x="6804139" y="1677578"/>
+                  </a:lnTo>
+                  <a:lnTo>
+                    <a:pt x="6732517" y="1669641"/>
+                  </a:lnTo>
+                  <a:lnTo>
+                    <a:pt x="6660894" y="1661584"/>
+                  </a:lnTo>
+                  <a:lnTo>
+                    <a:pt x="6589272" y="1653402"/>
+                  </a:lnTo>
+                  <a:lnTo>
+                    <a:pt x="6517649" y="1645096"/>
+                  </a:lnTo>
+                  <a:lnTo>
+                    <a:pt x="6446027" y="1636662"/>
+                  </a:lnTo>
+                  <a:lnTo>
+                    <a:pt x="6374404" y="1628099"/>
+                  </a:lnTo>
+                  <a:lnTo>
+                    <a:pt x="6302782" y="1619405"/>
+                  </a:lnTo>
+                  <a:lnTo>
+                    <a:pt x="6231159" y="1610578"/>
+                  </a:lnTo>
+                  <a:lnTo>
+                    <a:pt x="6159537" y="1601616"/>
+                  </a:lnTo>
+                  <a:lnTo>
+                    <a:pt x="6087914" y="1592516"/>
+                  </a:lnTo>
+                  <a:lnTo>
+                    <a:pt x="6016292" y="1583277"/>
+                  </a:lnTo>
+                  <a:lnTo>
+                    <a:pt x="5944669" y="1573897"/>
+                  </a:lnTo>
+                  <a:lnTo>
+                    <a:pt x="5873047" y="1564373"/>
+                  </a:lnTo>
+                  <a:lnTo>
+                    <a:pt x="5801424" y="1554703"/>
+                  </a:lnTo>
+                  <a:lnTo>
+                    <a:pt x="5729802" y="1544884"/>
+                  </a:lnTo>
+                  <a:lnTo>
+                    <a:pt x="5658179" y="1534916"/>
+                  </a:lnTo>
+                  <a:lnTo>
+                    <a:pt x="5586557" y="1524795"/>
+                  </a:lnTo>
+                  <a:lnTo>
+                    <a:pt x="5514934" y="1514518"/>
+                  </a:lnTo>
+                  <a:lnTo>
+                    <a:pt x="5443311" y="1504085"/>
+                  </a:lnTo>
+                  <a:lnTo>
+                    <a:pt x="5371689" y="1493491"/>
+                  </a:lnTo>
+                  <a:lnTo>
+                    <a:pt x="5300066" y="1482736"/>
+                  </a:lnTo>
+                  <a:lnTo>
+                    <a:pt x="5228444" y="1471815"/>
+                  </a:lnTo>
+                  <a:lnTo>
+                    <a:pt x="5156821" y="1460728"/>
+                  </a:lnTo>
+                  <a:lnTo>
+                    <a:pt x="5085199" y="1449470"/>
+                  </a:lnTo>
+                  <a:lnTo>
+                    <a:pt x="5013576" y="1438041"/>
+                  </a:lnTo>
+                  <a:lnTo>
+                    <a:pt x="4941954" y="1426436"/>
+                  </a:lnTo>
+                  <a:lnTo>
+                    <a:pt x="4870331" y="1414653"/>
+                  </a:lnTo>
+                  <a:lnTo>
+                    <a:pt x="4798709" y="1402690"/>
+                  </a:lnTo>
+                  <a:lnTo>
+                    <a:pt x="4727086" y="1390543"/>
+                  </a:lnTo>
+                  <a:lnTo>
+                    <a:pt x="4655464" y="1378211"/>
+                  </a:lnTo>
+                  <a:lnTo>
+                    <a:pt x="4583841" y="1366985"/>
+                  </a:lnTo>
+                  <a:lnTo>
+                    <a:pt x="4512219" y="1381687"/>
+                  </a:lnTo>
+                  <a:lnTo>
+                    <a:pt x="4440596" y="1396129"/>
+                  </a:lnTo>
+                  <a:lnTo>
+                    <a:pt x="4368974" y="1410314"/>
+                  </a:lnTo>
+                  <a:lnTo>
+                    <a:pt x="4297351" y="1424247"/>
+                  </a:lnTo>
+                  <a:lnTo>
+                    <a:pt x="4225729" y="1437933"/>
+                  </a:lnTo>
+                  <a:lnTo>
+                    <a:pt x="4154106" y="1451377"/>
+                  </a:lnTo>
+                  <a:lnTo>
+                    <a:pt x="4082483" y="1464582"/>
+                  </a:lnTo>
+                  <a:lnTo>
+                    <a:pt x="4010861" y="1477552"/>
+                  </a:lnTo>
+                  <a:lnTo>
+                    <a:pt x="3939238" y="1490293"/>
+                  </a:lnTo>
+                  <a:lnTo>
+                    <a:pt x="3867616" y="1502807"/>
+                  </a:lnTo>
+                  <a:lnTo>
+                    <a:pt x="3795993" y="1515100"/>
+                  </a:lnTo>
+                  <a:lnTo>
+                    <a:pt x="3724371" y="1527175"/>
+                  </a:lnTo>
+                  <a:lnTo>
+                    <a:pt x="3652748" y="1539035"/>
+                  </a:lnTo>
+                  <a:lnTo>
+                    <a:pt x="3581126" y="1550685"/>
+                  </a:lnTo>
+                  <a:lnTo>
+                    <a:pt x="3509503" y="1562128"/>
+                  </a:lnTo>
+                  <a:lnTo>
+                    <a:pt x="3437881" y="1573368"/>
+                  </a:lnTo>
+                  <a:lnTo>
+                    <a:pt x="3366258" y="1584409"/>
+                  </a:lnTo>
+                  <a:lnTo>
+                    <a:pt x="3294636" y="1595254"/>
+                  </a:lnTo>
+                  <a:lnTo>
+                    <a:pt x="3223013" y="1605907"/>
+                  </a:lnTo>
+                  <a:lnTo>
+                    <a:pt x="3151391" y="1616370"/>
+                  </a:lnTo>
+                  <a:lnTo>
+                    <a:pt x="3079768" y="1626648"/>
+                  </a:lnTo>
+                  <a:lnTo>
+                    <a:pt x="3008146" y="1636744"/>
+                  </a:lnTo>
+                  <a:lnTo>
+                    <a:pt x="2936523" y="1646661"/>
+                  </a:lnTo>
+                  <a:lnTo>
+                    <a:pt x="2864901" y="1656401"/>
+                  </a:lnTo>
+                  <a:lnTo>
+                    <a:pt x="2793278" y="1665969"/>
+                  </a:lnTo>
+                  <a:lnTo>
+                    <a:pt x="2721655" y="1675367"/>
+                  </a:lnTo>
+                  <a:lnTo>
+                    <a:pt x="2650033" y="1684599"/>
+                  </a:lnTo>
+                  <a:lnTo>
+                    <a:pt x="2578410" y="1693666"/>
+                  </a:lnTo>
+                  <a:lnTo>
+                    <a:pt x="2506788" y="1702573"/>
+                  </a:lnTo>
+                  <a:lnTo>
+                    <a:pt x="2435165" y="1711322"/>
+                  </a:lnTo>
+                  <a:lnTo>
+                    <a:pt x="2363543" y="1719915"/>
+                  </a:lnTo>
+                  <a:lnTo>
+                    <a:pt x="2291920" y="1728357"/>
+                  </a:lnTo>
+                  <a:lnTo>
+                    <a:pt x="2220298" y="1736648"/>
+                  </a:lnTo>
+                  <a:lnTo>
+                    <a:pt x="2148675" y="1744792"/>
+                  </a:lnTo>
+                  <a:lnTo>
+                    <a:pt x="2077053" y="1752792"/>
+                  </a:lnTo>
+                  <a:lnTo>
+                    <a:pt x="2005430" y="1760650"/>
+                  </a:lnTo>
+                  <a:lnTo>
+                    <a:pt x="1933808" y="1768369"/>
+                  </a:lnTo>
+                  <a:lnTo>
+                    <a:pt x="1862185" y="1775950"/>
+                  </a:lnTo>
+                  <a:lnTo>
+                    <a:pt x="1790563" y="1783397"/>
+                  </a:lnTo>
+                  <a:lnTo>
+                    <a:pt x="1718940" y="1790712"/>
+                  </a:lnTo>
+                  <a:lnTo>
+                    <a:pt x="1647318" y="1797897"/>
+                  </a:lnTo>
+                  <a:lnTo>
+                    <a:pt x="1575695" y="1804955"/>
+                  </a:lnTo>
+                  <a:lnTo>
+                    <a:pt x="1504073" y="1811888"/>
+                  </a:lnTo>
+                  <a:lnTo>
+                    <a:pt x="1432450" y="1818697"/>
+                  </a:lnTo>
+                  <a:lnTo>
+                    <a:pt x="1360827" y="1825386"/>
+                  </a:lnTo>
+                  <a:lnTo>
+                    <a:pt x="1289205" y="1831956"/>
+                  </a:lnTo>
+                  <a:lnTo>
+                    <a:pt x="1217582" y="1838410"/>
+                  </a:lnTo>
+                  <a:lnTo>
+                    <a:pt x="1145960" y="1844749"/>
+                  </a:lnTo>
+                  <a:lnTo>
+                    <a:pt x="1074337" y="1850976"/>
+                  </a:lnTo>
+                  <a:lnTo>
+                    <a:pt x="1002715" y="1857092"/>
+                  </a:lnTo>
+                  <a:lnTo>
+                    <a:pt x="931092" y="1863099"/>
+                  </a:lnTo>
+                  <a:lnTo>
+                    <a:pt x="859470" y="1869000"/>
+                  </a:lnTo>
+                  <a:lnTo>
+                    <a:pt x="787847" y="1874797"/>
+                  </a:lnTo>
+                  <a:lnTo>
+                    <a:pt x="716225" y="1880490"/>
+                  </a:lnTo>
+                  <a:lnTo>
+                    <a:pt x="644602" y="1886083"/>
+                  </a:lnTo>
+                  <a:lnTo>
+                    <a:pt x="572980" y="1891576"/>
+                  </a:lnTo>
+                  <a:lnTo>
+                    <a:pt x="501357" y="1896972"/>
+                  </a:lnTo>
+                  <a:lnTo>
+                    <a:pt x="429735" y="1902273"/>
+                  </a:lnTo>
+                  <a:lnTo>
+                    <a:pt x="358112" y="1907479"/>
+                  </a:lnTo>
+                  <a:lnTo>
+                    <a:pt x="286490" y="1912593"/>
+                  </a:lnTo>
+                  <a:lnTo>
+                    <a:pt x="214867" y="1917616"/>
+                  </a:lnTo>
+                  <a:lnTo>
+                    <a:pt x="143245" y="1922550"/>
+                  </a:lnTo>
+                  <a:lnTo>
+                    <a:pt x="71622" y="1927396"/>
+                  </a:lnTo>
+                  <a:lnTo>
+                    <a:pt x="0" y="1932157"/>
                   </a:lnTo>
                   <a:close/>
                 </a:path>
@@ -3547,312 +3547,312 @@
           </p:nvSpPr>
           <p:spPr>
             <a:xfrm>
-              <a:off x="1172049" y="3495295"/>
-              <a:ext cx="7090630" cy="1232398"/>
+              <a:off x="1172049" y="3361500"/>
+              <a:ext cx="7090630" cy="1365690"/>
             </a:xfrm>
             <a:custGeom>
               <a:avLst/>
               <a:pathLst>
-                <a:path w="7090630" h="1232398">
+                <a:path w="7090630" h="1365690">
                   <a:moveTo>
                     <a:pt x="0" y="0"/>
                   </a:moveTo>
                   <a:lnTo>
-                    <a:pt x="71622" y="29127"/>
-                  </a:lnTo>
-                  <a:lnTo>
-                    <a:pt x="143245" y="57843"/>
-                  </a:lnTo>
-                  <a:lnTo>
-                    <a:pt x="214867" y="86153"/>
-                  </a:lnTo>
-                  <a:lnTo>
-                    <a:pt x="286490" y="114064"/>
-                  </a:lnTo>
-                  <a:lnTo>
-                    <a:pt x="358112" y="141580"/>
-                  </a:lnTo>
-                  <a:lnTo>
-                    <a:pt x="429735" y="168707"/>
-                  </a:lnTo>
-                  <a:lnTo>
-                    <a:pt x="501357" y="195452"/>
-                  </a:lnTo>
-                  <a:lnTo>
-                    <a:pt x="572980" y="221818"/>
-                  </a:lnTo>
-                  <a:lnTo>
-                    <a:pt x="644602" y="247812"/>
-                  </a:lnTo>
-                  <a:lnTo>
-                    <a:pt x="716225" y="273439"/>
-                  </a:lnTo>
-                  <a:lnTo>
-                    <a:pt x="787847" y="298704"/>
-                  </a:lnTo>
-                  <a:lnTo>
-                    <a:pt x="859470" y="323612"/>
-                  </a:lnTo>
-                  <a:lnTo>
-                    <a:pt x="931092" y="348168"/>
-                  </a:lnTo>
-                  <a:lnTo>
-                    <a:pt x="1002715" y="372377"/>
-                  </a:lnTo>
-                  <a:lnTo>
-                    <a:pt x="1074337" y="396244"/>
-                  </a:lnTo>
-                  <a:lnTo>
-                    <a:pt x="1145960" y="419774"/>
-                  </a:lnTo>
-                  <a:lnTo>
-                    <a:pt x="1217582" y="442972"/>
-                  </a:lnTo>
-                  <a:lnTo>
-                    <a:pt x="1289205" y="465842"/>
-                  </a:lnTo>
-                  <a:lnTo>
-                    <a:pt x="1360827" y="488389"/>
-                  </a:lnTo>
-                  <a:lnTo>
-                    <a:pt x="1432450" y="510617"/>
-                  </a:lnTo>
-                  <a:lnTo>
-                    <a:pt x="1504073" y="532531"/>
-                  </a:lnTo>
-                  <a:lnTo>
-                    <a:pt x="1575695" y="554136"/>
-                  </a:lnTo>
-                  <a:lnTo>
-                    <a:pt x="1647318" y="575436"/>
-                  </a:lnTo>
-                  <a:lnTo>
-                    <a:pt x="1718940" y="596435"/>
-                  </a:lnTo>
-                  <a:lnTo>
-                    <a:pt x="1790563" y="617137"/>
-                  </a:lnTo>
-                  <a:lnTo>
-                    <a:pt x="1862185" y="637547"/>
-                  </a:lnTo>
-                  <a:lnTo>
-                    <a:pt x="1933808" y="657668"/>
-                  </a:lnTo>
-                  <a:lnTo>
-                    <a:pt x="2005430" y="677505"/>
-                  </a:lnTo>
-                  <a:lnTo>
-                    <a:pt x="2077053" y="697062"/>
-                  </a:lnTo>
-                  <a:lnTo>
-                    <a:pt x="2148675" y="716343"/>
-                  </a:lnTo>
-                  <a:lnTo>
-                    <a:pt x="2220298" y="735351"/>
-                  </a:lnTo>
-                  <a:lnTo>
-                    <a:pt x="2291920" y="754091"/>
-                  </a:lnTo>
-                  <a:lnTo>
-                    <a:pt x="2363543" y="772566"/>
-                  </a:lnTo>
-                  <a:lnTo>
-                    <a:pt x="2435165" y="790780"/>
-                  </a:lnTo>
-                  <a:lnTo>
-                    <a:pt x="2506788" y="808737"/>
-                  </a:lnTo>
-                  <a:lnTo>
-                    <a:pt x="2578410" y="826440"/>
-                  </a:lnTo>
-                  <a:lnTo>
-                    <a:pt x="2650033" y="843893"/>
-                  </a:lnTo>
-                  <a:lnTo>
-                    <a:pt x="2721655" y="861099"/>
-                  </a:lnTo>
-                  <a:lnTo>
-                    <a:pt x="2793278" y="878063"/>
-                  </a:lnTo>
-                  <a:lnTo>
-                    <a:pt x="2864901" y="894787"/>
-                  </a:lnTo>
-                  <a:lnTo>
-                    <a:pt x="2936523" y="911274"/>
-                  </a:lnTo>
-                  <a:lnTo>
-                    <a:pt x="3008146" y="927529"/>
-                  </a:lnTo>
-                  <a:lnTo>
-                    <a:pt x="3079768" y="943554"/>
-                  </a:lnTo>
-                  <a:lnTo>
-                    <a:pt x="3151391" y="959352"/>
-                  </a:lnTo>
-                  <a:lnTo>
-                    <a:pt x="3223013" y="974928"/>
-                  </a:lnTo>
-                  <a:lnTo>
-                    <a:pt x="3294636" y="990283"/>
-                  </a:lnTo>
-                  <a:lnTo>
-                    <a:pt x="3366258" y="1005422"/>
-                  </a:lnTo>
-                  <a:lnTo>
-                    <a:pt x="3437881" y="1020347"/>
-                  </a:lnTo>
-                  <a:lnTo>
-                    <a:pt x="3509503" y="1035061"/>
-                  </a:lnTo>
-                  <a:lnTo>
-                    <a:pt x="3581126" y="1049567"/>
-                  </a:lnTo>
-                  <a:lnTo>
-                    <a:pt x="3652748" y="1063868"/>
-                  </a:lnTo>
-                  <a:lnTo>
-                    <a:pt x="3724371" y="1077967"/>
-                  </a:lnTo>
-                  <a:lnTo>
-                    <a:pt x="3795993" y="1091867"/>
-                  </a:lnTo>
-                  <a:lnTo>
-                    <a:pt x="3867616" y="1105570"/>
-                  </a:lnTo>
-                  <a:lnTo>
-                    <a:pt x="3939238" y="1119080"/>
-                  </a:lnTo>
-                  <a:lnTo>
-                    <a:pt x="4010861" y="1132400"/>
-                  </a:lnTo>
-                  <a:lnTo>
-                    <a:pt x="4082483" y="1145531"/>
-                  </a:lnTo>
-                  <a:lnTo>
-                    <a:pt x="4154106" y="1158476"/>
-                  </a:lnTo>
-                  <a:lnTo>
-                    <a:pt x="4225729" y="1171239"/>
-                  </a:lnTo>
-                  <a:lnTo>
-                    <a:pt x="4297351" y="1183821"/>
-                  </a:lnTo>
-                  <a:lnTo>
-                    <a:pt x="4368974" y="1196226"/>
-                  </a:lnTo>
-                  <a:lnTo>
-                    <a:pt x="4440596" y="1208455"/>
-                  </a:lnTo>
-                  <a:lnTo>
-                    <a:pt x="4512219" y="1220512"/>
-                  </a:lnTo>
-                  <a:lnTo>
-                    <a:pt x="4583841" y="1232398"/>
-                  </a:lnTo>
-                  <a:lnTo>
-                    <a:pt x="4655464" y="1216954"/>
-                  </a:lnTo>
-                  <a:lnTo>
-                    <a:pt x="4727086" y="1201002"/>
-                  </a:lnTo>
-                  <a:lnTo>
-                    <a:pt x="4798709" y="1184749"/>
-                  </a:lnTo>
-                  <a:lnTo>
-                    <a:pt x="4870331" y="1168189"/>
-                  </a:lnTo>
-                  <a:lnTo>
-                    <a:pt x="4941954" y="1151316"/>
-                  </a:lnTo>
-                  <a:lnTo>
-                    <a:pt x="5013576" y="1134125"/>
-                  </a:lnTo>
-                  <a:lnTo>
-                    <a:pt x="5085199" y="1116609"/>
-                  </a:lnTo>
-                  <a:lnTo>
-                    <a:pt x="5156821" y="1098762"/>
-                  </a:lnTo>
-                  <a:lnTo>
-                    <a:pt x="5228444" y="1080579"/>
-                  </a:lnTo>
-                  <a:lnTo>
-                    <a:pt x="5300066" y="1062052"/>
-                  </a:lnTo>
-                  <a:lnTo>
-                    <a:pt x="5371689" y="1043176"/>
-                  </a:lnTo>
-                  <a:lnTo>
-                    <a:pt x="5443311" y="1023943"/>
-                  </a:lnTo>
-                  <a:lnTo>
-                    <a:pt x="5514934" y="1004347"/>
-                  </a:lnTo>
-                  <a:lnTo>
-                    <a:pt x="5586557" y="984381"/>
-                  </a:lnTo>
-                  <a:lnTo>
-                    <a:pt x="5658179" y="964039"/>
-                  </a:lnTo>
-                  <a:lnTo>
-                    <a:pt x="5729802" y="943312"/>
-                  </a:lnTo>
-                  <a:lnTo>
-                    <a:pt x="5801424" y="922194"/>
-                  </a:lnTo>
-                  <a:lnTo>
-                    <a:pt x="5873047" y="900677"/>
-                  </a:lnTo>
-                  <a:lnTo>
-                    <a:pt x="5944669" y="878754"/>
-                  </a:lnTo>
-                  <a:lnTo>
-                    <a:pt x="6016292" y="856418"/>
-                  </a:lnTo>
-                  <a:lnTo>
-                    <a:pt x="6087914" y="833659"/>
-                  </a:lnTo>
-                  <a:lnTo>
-                    <a:pt x="6159537" y="810471"/>
-                  </a:lnTo>
-                  <a:lnTo>
-                    <a:pt x="6231159" y="786845"/>
-                  </a:lnTo>
-                  <a:lnTo>
-                    <a:pt x="6302782" y="762773"/>
-                  </a:lnTo>
-                  <a:lnTo>
-                    <a:pt x="6374404" y="738247"/>
-                  </a:lnTo>
-                  <a:lnTo>
-                    <a:pt x="6446027" y="713258"/>
-                  </a:lnTo>
-                  <a:lnTo>
-                    <a:pt x="6517649" y="687797"/>
-                  </a:lnTo>
-                  <a:lnTo>
-                    <a:pt x="6589272" y="661855"/>
-                  </a:lnTo>
-                  <a:lnTo>
-                    <a:pt x="6660894" y="635424"/>
-                  </a:lnTo>
-                  <a:lnTo>
-                    <a:pt x="6732517" y="608493"/>
-                  </a:lnTo>
-                  <a:lnTo>
-                    <a:pt x="6804139" y="581054"/>
-                  </a:lnTo>
-                  <a:lnTo>
-                    <a:pt x="6875762" y="553098"/>
-                  </a:lnTo>
-                  <a:lnTo>
-                    <a:pt x="6947385" y="524613"/>
-                  </a:lnTo>
-                  <a:lnTo>
-                    <a:pt x="7019007" y="495591"/>
-                  </a:lnTo>
-                  <a:lnTo>
-                    <a:pt x="7090630" y="466020"/>
+                    <a:pt x="71622" y="33122"/>
+                  </a:lnTo>
+                  <a:lnTo>
+                    <a:pt x="143245" y="65745"/>
+                  </a:lnTo>
+                  <a:lnTo>
+                    <a:pt x="214867" y="97875"/>
+                  </a:lnTo>
+                  <a:lnTo>
+                    <a:pt x="286490" y="129521"/>
+                  </a:lnTo>
+                  <a:lnTo>
+                    <a:pt x="358112" y="160690"/>
+                  </a:lnTo>
+                  <a:lnTo>
+                    <a:pt x="429735" y="191388"/>
+                  </a:lnTo>
+                  <a:lnTo>
+                    <a:pt x="501357" y="221624"/>
+                  </a:lnTo>
+                  <a:lnTo>
+                    <a:pt x="572980" y="251403"/>
+                  </a:lnTo>
+                  <a:lnTo>
+                    <a:pt x="644602" y="280733"/>
+                  </a:lnTo>
+                  <a:lnTo>
+                    <a:pt x="716225" y="309621"/>
+                  </a:lnTo>
+                  <a:lnTo>
+                    <a:pt x="787847" y="338072"/>
+                  </a:lnTo>
+                  <a:lnTo>
+                    <a:pt x="859470" y="366095"/>
+                  </a:lnTo>
+                  <a:lnTo>
+                    <a:pt x="931092" y="393695"/>
+                  </a:lnTo>
+                  <a:lnTo>
+                    <a:pt x="1002715" y="420879"/>
+                  </a:lnTo>
+                  <a:lnTo>
+                    <a:pt x="1074337" y="447652"/>
+                  </a:lnTo>
+                  <a:lnTo>
+                    <a:pt x="1145960" y="474022"/>
+                  </a:lnTo>
+                  <a:lnTo>
+                    <a:pt x="1217582" y="499994"/>
+                  </a:lnTo>
+                  <a:lnTo>
+                    <a:pt x="1289205" y="525574"/>
+                  </a:lnTo>
+                  <a:lnTo>
+                    <a:pt x="1360827" y="550768"/>
+                  </a:lnTo>
+                  <a:lnTo>
+                    <a:pt x="1432450" y="575582"/>
+                  </a:lnTo>
+                  <a:lnTo>
+                    <a:pt x="1504073" y="600022"/>
+                  </a:lnTo>
+                  <a:lnTo>
+                    <a:pt x="1575695" y="624093"/>
+                  </a:lnTo>
+                  <a:lnTo>
+                    <a:pt x="1647318" y="647801"/>
+                  </a:lnTo>
+                  <a:lnTo>
+                    <a:pt x="1718940" y="671152"/>
+                  </a:lnTo>
+                  <a:lnTo>
+                    <a:pt x="1790563" y="694150"/>
+                  </a:lnTo>
+                  <a:lnTo>
+                    <a:pt x="1862185" y="716801"/>
+                  </a:lnTo>
+                  <a:lnTo>
+                    <a:pt x="1933808" y="739111"/>
+                  </a:lnTo>
+                  <a:lnTo>
+                    <a:pt x="2005430" y="761084"/>
+                  </a:lnTo>
+                  <a:lnTo>
+                    <a:pt x="2077053" y="782726"/>
+                  </a:lnTo>
+                  <a:lnTo>
+                    <a:pt x="2148675" y="804041"/>
+                  </a:lnTo>
+                  <a:lnTo>
+                    <a:pt x="2220298" y="825034"/>
+                  </a:lnTo>
+                  <a:lnTo>
+                    <a:pt x="2291920" y="845711"/>
+                  </a:lnTo>
+                  <a:lnTo>
+                    <a:pt x="2363543" y="866076"/>
+                  </a:lnTo>
+                  <a:lnTo>
+                    <a:pt x="2435165" y="886134"/>
+                  </a:lnTo>
+                  <a:lnTo>
+                    <a:pt x="2506788" y="905889"/>
+                  </a:lnTo>
+                  <a:lnTo>
+                    <a:pt x="2578410" y="925347"/>
+                  </a:lnTo>
+                  <a:lnTo>
+                    <a:pt x="2650033" y="944510"/>
+                  </a:lnTo>
+                  <a:lnTo>
+                    <a:pt x="2721655" y="963385"/>
+                  </a:lnTo>
+                  <a:lnTo>
+                    <a:pt x="2793278" y="981975"/>
+                  </a:lnTo>
+                  <a:lnTo>
+                    <a:pt x="2864901" y="1000284"/>
+                  </a:lnTo>
+                  <a:lnTo>
+                    <a:pt x="2936523" y="1018318"/>
+                  </a:lnTo>
+                  <a:lnTo>
+                    <a:pt x="3008146" y="1036079"/>
+                  </a:lnTo>
+                  <a:lnTo>
+                    <a:pt x="3079768" y="1053572"/>
+                  </a:lnTo>
+                  <a:lnTo>
+                    <a:pt x="3151391" y="1070802"/>
+                  </a:lnTo>
+                  <a:lnTo>
+                    <a:pt x="3223013" y="1087772"/>
+                  </a:lnTo>
+                  <a:lnTo>
+                    <a:pt x="3294636" y="1104485"/>
+                  </a:lnTo>
+                  <a:lnTo>
+                    <a:pt x="3366258" y="1120947"/>
+                  </a:lnTo>
+                  <a:lnTo>
+                    <a:pt x="3437881" y="1137160"/>
+                  </a:lnTo>
+                  <a:lnTo>
+                    <a:pt x="3509503" y="1153128"/>
+                  </a:lnTo>
+                  <a:lnTo>
+                    <a:pt x="3581126" y="1168856"/>
+                  </a:lnTo>
+                  <a:lnTo>
+                    <a:pt x="3652748" y="1184347"/>
+                  </a:lnTo>
+                  <a:lnTo>
+                    <a:pt x="3724371" y="1199603"/>
+                  </a:lnTo>
+                  <a:lnTo>
+                    <a:pt x="3795993" y="1214630"/>
+                  </a:lnTo>
+                  <a:lnTo>
+                    <a:pt x="3867616" y="1229430"/>
+                  </a:lnTo>
+                  <a:lnTo>
+                    <a:pt x="3939238" y="1244007"/>
+                  </a:lnTo>
+                  <a:lnTo>
+                    <a:pt x="4010861" y="1258363"/>
+                  </a:lnTo>
+                  <a:lnTo>
+                    <a:pt x="4082483" y="1272504"/>
+                  </a:lnTo>
+                  <a:lnTo>
+                    <a:pt x="4154106" y="1286431"/>
+                  </a:lnTo>
+                  <a:lnTo>
+                    <a:pt x="4225729" y="1300148"/>
+                  </a:lnTo>
+                  <a:lnTo>
+                    <a:pt x="4297351" y="1313657"/>
+                  </a:lnTo>
+                  <a:lnTo>
+                    <a:pt x="4368974" y="1326964"/>
+                  </a:lnTo>
+                  <a:lnTo>
+                    <a:pt x="4440596" y="1340069"/>
+                  </a:lnTo>
+                  <a:lnTo>
+                    <a:pt x="4512219" y="1352977"/>
+                  </a:lnTo>
+                  <a:lnTo>
+                    <a:pt x="4583841" y="1365690"/>
+                  </a:lnTo>
+                  <a:lnTo>
+                    <a:pt x="4655464" y="1352018"/>
+                  </a:lnTo>
+                  <a:lnTo>
+                    <a:pt x="4727086" y="1336780"/>
+                  </a:lnTo>
+                  <a:lnTo>
+                    <a:pt x="4798709" y="1321267"/>
+                  </a:lnTo>
+                  <a:lnTo>
+                    <a:pt x="4870331" y="1305474"/>
+                  </a:lnTo>
+                  <a:lnTo>
+                    <a:pt x="4941954" y="1289395"/>
+                  </a:lnTo>
+                  <a:lnTo>
+                    <a:pt x="5013576" y="1273027"/>
+                  </a:lnTo>
+                  <a:lnTo>
+                    <a:pt x="5085199" y="1256362"/>
+                  </a:lnTo>
+                  <a:lnTo>
+                    <a:pt x="5156821" y="1239397"/>
+                  </a:lnTo>
+                  <a:lnTo>
+                    <a:pt x="5228444" y="1222125"/>
+                  </a:lnTo>
+                  <a:lnTo>
+                    <a:pt x="5300066" y="1204541"/>
+                  </a:lnTo>
+                  <a:lnTo>
+                    <a:pt x="5371689" y="1186640"/>
+                  </a:lnTo>
+                  <a:lnTo>
+                    <a:pt x="5443311" y="1168415"/>
+                  </a:lnTo>
+                  <a:lnTo>
+                    <a:pt x="5514934" y="1149862"/>
+                  </a:lnTo>
+                  <a:lnTo>
+                    <a:pt x="5586557" y="1130973"/>
+                  </a:lnTo>
+                  <a:lnTo>
+                    <a:pt x="5658179" y="1111743"/>
+                  </a:lnTo>
+                  <a:lnTo>
+                    <a:pt x="5729802" y="1092166"/>
+                  </a:lnTo>
+                  <a:lnTo>
+                    <a:pt x="5801424" y="1072235"/>
+                  </a:lnTo>
+                  <a:lnTo>
+                    <a:pt x="5873047" y="1051944"/>
+                  </a:lnTo>
+                  <a:lnTo>
+                    <a:pt x="5944669" y="1031287"/>
+                  </a:lnTo>
+                  <a:lnTo>
+                    <a:pt x="6016292" y="1010257"/>
+                  </a:lnTo>
+                  <a:lnTo>
+                    <a:pt x="6087914" y="988846"/>
+                  </a:lnTo>
+                  <a:lnTo>
+                    <a:pt x="6159537" y="967050"/>
+                  </a:lnTo>
+                  <a:lnTo>
+                    <a:pt x="6231159" y="944859"/>
+                  </a:lnTo>
+                  <a:lnTo>
+                    <a:pt x="6302782" y="922268"/>
+                  </a:lnTo>
+                  <a:lnTo>
+                    <a:pt x="6374404" y="899269"/>
+                  </a:lnTo>
+                  <a:lnTo>
+                    <a:pt x="6446027" y="875854"/>
+                  </a:lnTo>
+                  <a:lnTo>
+                    <a:pt x="6517649" y="852017"/>
+                  </a:lnTo>
+                  <a:lnTo>
+                    <a:pt x="6589272" y="827749"/>
+                  </a:lnTo>
+                  <a:lnTo>
+                    <a:pt x="6660894" y="803043"/>
+                  </a:lnTo>
+                  <a:lnTo>
+                    <a:pt x="6732517" y="777891"/>
+                  </a:lnTo>
+                  <a:lnTo>
+                    <a:pt x="6804139" y="752284"/>
+                  </a:lnTo>
+                  <a:lnTo>
+                    <a:pt x="6875762" y="726215"/>
+                  </a:lnTo>
+                  <a:lnTo>
+                    <a:pt x="6947385" y="699675"/>
+                  </a:lnTo>
+                  <a:lnTo>
+                    <a:pt x="7019007" y="672656"/>
+                  </a:lnTo>
+                  <a:lnTo>
+                    <a:pt x="7090630" y="645149"/>
                   </a:lnTo>
                 </a:path>
               </a:pathLst>
@@ -3872,312 +3872,312 @@
           </p:nvSpPr>
           <p:spPr>
             <a:xfrm>
-              <a:off x="1172049" y="4727907"/>
-              <a:ext cx="7090630" cy="578785"/>
+              <a:off x="1172049" y="4728486"/>
+              <a:ext cx="7090630" cy="565171"/>
             </a:xfrm>
             <a:custGeom>
               <a:avLst/>
               <a:pathLst>
-                <a:path w="7090630" h="578785">
+                <a:path w="7090630" h="565171">
                   <a:moveTo>
-                    <a:pt x="7090630" y="325154"/>
+                    <a:pt x="7090630" y="341157"/>
                   </a:moveTo>
                   <a:lnTo>
-                    <a:pt x="7019007" y="317930"/>
-                  </a:lnTo>
-                  <a:lnTo>
-                    <a:pt x="6947385" y="310602"/>
-                  </a:lnTo>
-                  <a:lnTo>
-                    <a:pt x="6875762" y="303169"/>
-                  </a:lnTo>
-                  <a:lnTo>
-                    <a:pt x="6804139" y="295630"/>
-                  </a:lnTo>
-                  <a:lnTo>
-                    <a:pt x="6732517" y="287983"/>
-                  </a:lnTo>
-                  <a:lnTo>
-                    <a:pt x="6660894" y="280226"/>
-                  </a:lnTo>
-                  <a:lnTo>
-                    <a:pt x="6589272" y="272358"/>
-                  </a:lnTo>
-                  <a:lnTo>
-                    <a:pt x="6517649" y="264377"/>
-                  </a:lnTo>
-                  <a:lnTo>
-                    <a:pt x="6446027" y="256282"/>
-                  </a:lnTo>
-                  <a:lnTo>
-                    <a:pt x="6374404" y="248071"/>
-                  </a:lnTo>
-                  <a:lnTo>
-                    <a:pt x="6302782" y="239742"/>
-                  </a:lnTo>
-                  <a:lnTo>
-                    <a:pt x="6231159" y="231294"/>
-                  </a:lnTo>
-                  <a:lnTo>
-                    <a:pt x="6159537" y="222725"/>
-                  </a:lnTo>
-                  <a:lnTo>
-                    <a:pt x="6087914" y="214033"/>
-                  </a:lnTo>
-                  <a:lnTo>
-                    <a:pt x="6016292" y="205216"/>
-                  </a:lnTo>
-                  <a:lnTo>
-                    <a:pt x="5944669" y="196273"/>
-                  </a:lnTo>
-                  <a:lnTo>
-                    <a:pt x="5873047" y="187202"/>
-                  </a:lnTo>
-                  <a:lnTo>
-                    <a:pt x="5801424" y="178001"/>
-                  </a:lnTo>
-                  <a:lnTo>
-                    <a:pt x="5729802" y="168669"/>
-                  </a:lnTo>
-                  <a:lnTo>
-                    <a:pt x="5658179" y="159202"/>
-                  </a:lnTo>
-                  <a:lnTo>
-                    <a:pt x="5586557" y="149600"/>
-                  </a:lnTo>
-                  <a:lnTo>
-                    <a:pt x="5514934" y="139860"/>
-                  </a:lnTo>
-                  <a:lnTo>
-                    <a:pt x="5443311" y="129981"/>
-                  </a:lnTo>
-                  <a:lnTo>
-                    <a:pt x="5371689" y="119960"/>
-                  </a:lnTo>
-                  <a:lnTo>
-                    <a:pt x="5300066" y="109796"/>
-                  </a:lnTo>
-                  <a:lnTo>
-                    <a:pt x="5228444" y="99486"/>
-                  </a:lnTo>
-                  <a:lnTo>
-                    <a:pt x="5156821" y="89028"/>
-                  </a:lnTo>
-                  <a:lnTo>
-                    <a:pt x="5085199" y="78420"/>
-                  </a:lnTo>
-                  <a:lnTo>
-                    <a:pt x="5013576" y="67661"/>
-                  </a:lnTo>
-                  <a:lnTo>
-                    <a:pt x="4941954" y="56747"/>
-                  </a:lnTo>
-                  <a:lnTo>
-                    <a:pt x="4870331" y="45677"/>
-                  </a:lnTo>
-                  <a:lnTo>
-                    <a:pt x="4798709" y="34448"/>
-                  </a:lnTo>
-                  <a:lnTo>
-                    <a:pt x="4727086" y="23058"/>
-                  </a:lnTo>
-                  <a:lnTo>
-                    <a:pt x="4655464" y="11505"/>
+                    <a:pt x="7019007" y="333689"/>
+                  </a:lnTo>
+                  <a:lnTo>
+                    <a:pt x="6947385" y="326107"/>
+                  </a:lnTo>
+                  <a:lnTo>
+                    <a:pt x="6875762" y="318408"/>
+                  </a:lnTo>
+                  <a:lnTo>
+                    <a:pt x="6804139" y="310592"/>
+                  </a:lnTo>
+                  <a:lnTo>
+                    <a:pt x="6732517" y="302656"/>
+                  </a:lnTo>
+                  <a:lnTo>
+                    <a:pt x="6660894" y="294598"/>
+                  </a:lnTo>
+                  <a:lnTo>
+                    <a:pt x="6589272" y="286417"/>
+                  </a:lnTo>
+                  <a:lnTo>
+                    <a:pt x="6517649" y="278110"/>
+                  </a:lnTo>
+                  <a:lnTo>
+                    <a:pt x="6446027" y="269676"/>
+                  </a:lnTo>
+                  <a:lnTo>
+                    <a:pt x="6374404" y="261114"/>
+                  </a:lnTo>
+                  <a:lnTo>
+                    <a:pt x="6302782" y="252420"/>
+                  </a:lnTo>
+                  <a:lnTo>
+                    <a:pt x="6231159" y="243592"/>
+                  </a:lnTo>
+                  <a:lnTo>
+                    <a:pt x="6159537" y="234630"/>
+                  </a:lnTo>
+                  <a:lnTo>
+                    <a:pt x="6087914" y="225530"/>
+                  </a:lnTo>
+                  <a:lnTo>
+                    <a:pt x="6016292" y="216291"/>
+                  </a:lnTo>
+                  <a:lnTo>
+                    <a:pt x="5944669" y="206911"/>
+                  </a:lnTo>
+                  <a:lnTo>
+                    <a:pt x="5873047" y="197387"/>
+                  </a:lnTo>
+                  <a:lnTo>
+                    <a:pt x="5801424" y="187717"/>
+                  </a:lnTo>
+                  <a:lnTo>
+                    <a:pt x="5729802" y="177898"/>
+                  </a:lnTo>
+                  <a:lnTo>
+                    <a:pt x="5658179" y="167930"/>
+                  </a:lnTo>
+                  <a:lnTo>
+                    <a:pt x="5586557" y="157809"/>
+                  </a:lnTo>
+                  <a:lnTo>
+                    <a:pt x="5514934" y="147533"/>
+                  </a:lnTo>
+                  <a:lnTo>
+                    <a:pt x="5443311" y="137099"/>
+                  </a:lnTo>
+                  <a:lnTo>
+                    <a:pt x="5371689" y="126506"/>
+                  </a:lnTo>
+                  <a:lnTo>
+                    <a:pt x="5300066" y="115750"/>
+                  </a:lnTo>
+                  <a:lnTo>
+                    <a:pt x="5228444" y="104830"/>
+                  </a:lnTo>
+                  <a:lnTo>
+                    <a:pt x="5156821" y="93742"/>
+                  </a:lnTo>
+                  <a:lnTo>
+                    <a:pt x="5085199" y="82484"/>
+                  </a:lnTo>
+                  <a:lnTo>
+                    <a:pt x="5013576" y="71055"/>
+                  </a:lnTo>
+                  <a:lnTo>
+                    <a:pt x="4941954" y="59450"/>
+                  </a:lnTo>
+                  <a:lnTo>
+                    <a:pt x="4870331" y="47667"/>
+                  </a:lnTo>
+                  <a:lnTo>
+                    <a:pt x="4798709" y="35704"/>
+                  </a:lnTo>
+                  <a:lnTo>
+                    <a:pt x="4727086" y="23558"/>
+                  </a:lnTo>
+                  <a:lnTo>
+                    <a:pt x="4655464" y="11225"/>
                   </a:lnTo>
                   <a:lnTo>
                     <a:pt x="4583841" y="0"/>
                   </a:lnTo>
                   <a:lnTo>
-                    <a:pt x="4512219" y="15366"/>
-                  </a:lnTo>
-                  <a:lnTo>
-                    <a:pt x="4440596" y="30448"/>
-                  </a:lnTo>
-                  <a:lnTo>
-                    <a:pt x="4368974" y="45250"/>
-                  </a:lnTo>
-                  <a:lnTo>
-                    <a:pt x="4297351" y="59778"/>
-                  </a:lnTo>
-                  <a:lnTo>
-                    <a:pt x="4225729" y="74037"/>
-                  </a:lnTo>
-                  <a:lnTo>
-                    <a:pt x="4154106" y="88032"/>
-                  </a:lnTo>
-                  <a:lnTo>
-                    <a:pt x="4082483" y="101767"/>
-                  </a:lnTo>
-                  <a:lnTo>
-                    <a:pt x="4010861" y="115248"/>
-                  </a:lnTo>
-                  <a:lnTo>
-                    <a:pt x="3939238" y="128479"/>
-                  </a:lnTo>
-                  <a:lnTo>
-                    <a:pt x="3867616" y="141465"/>
-                  </a:lnTo>
-                  <a:lnTo>
-                    <a:pt x="3795993" y="154210"/>
-                  </a:lnTo>
-                  <a:lnTo>
-                    <a:pt x="3724371" y="166719"/>
-                  </a:lnTo>
-                  <a:lnTo>
-                    <a:pt x="3652748" y="178997"/>
-                  </a:lnTo>
-                  <a:lnTo>
-                    <a:pt x="3581126" y="191047"/>
-                  </a:lnTo>
-                  <a:lnTo>
-                    <a:pt x="3509503" y="202873"/>
-                  </a:lnTo>
-                  <a:lnTo>
-                    <a:pt x="3437881" y="214481"/>
-                  </a:lnTo>
-                  <a:lnTo>
-                    <a:pt x="3366258" y="225873"/>
-                  </a:lnTo>
-                  <a:lnTo>
-                    <a:pt x="3294636" y="237055"/>
-                  </a:lnTo>
-                  <a:lnTo>
-                    <a:pt x="3223013" y="248029"/>
-                  </a:lnTo>
-                  <a:lnTo>
-                    <a:pt x="3151391" y="258800"/>
-                  </a:lnTo>
-                  <a:lnTo>
-                    <a:pt x="3079768" y="269371"/>
-                  </a:lnTo>
-                  <a:lnTo>
-                    <a:pt x="3008146" y="279747"/>
-                  </a:lnTo>
-                  <a:lnTo>
-                    <a:pt x="2936523" y="289930"/>
-                  </a:lnTo>
-                  <a:lnTo>
-                    <a:pt x="2864901" y="299924"/>
-                  </a:lnTo>
-                  <a:lnTo>
-                    <a:pt x="2793278" y="309734"/>
-                  </a:lnTo>
-                  <a:lnTo>
-                    <a:pt x="2721655" y="319361"/>
-                  </a:lnTo>
-                  <a:lnTo>
-                    <a:pt x="2650033" y="328810"/>
-                  </a:lnTo>
-                  <a:lnTo>
-                    <a:pt x="2578410" y="338084"/>
-                  </a:lnTo>
-                  <a:lnTo>
-                    <a:pt x="2506788" y="347187"/>
-                  </a:lnTo>
-                  <a:lnTo>
-                    <a:pt x="2435165" y="356120"/>
-                  </a:lnTo>
-                  <a:lnTo>
-                    <a:pt x="2363543" y="364888"/>
-                  </a:lnTo>
-                  <a:lnTo>
-                    <a:pt x="2291920" y="373494"/>
-                  </a:lnTo>
-                  <a:lnTo>
-                    <a:pt x="2220298" y="381940"/>
-                  </a:lnTo>
-                  <a:lnTo>
-                    <a:pt x="2148675" y="390230"/>
-                  </a:lnTo>
-                  <a:lnTo>
-                    <a:pt x="2077053" y="398366"/>
-                  </a:lnTo>
-                  <a:lnTo>
-                    <a:pt x="2005430" y="406351"/>
-                  </a:lnTo>
-                  <a:lnTo>
-                    <a:pt x="1933808" y="414189"/>
-                  </a:lnTo>
-                  <a:lnTo>
-                    <a:pt x="1862185" y="421881"/>
-                  </a:lnTo>
-                  <a:lnTo>
-                    <a:pt x="1790563" y="429430"/>
-                  </a:lnTo>
-                  <a:lnTo>
-                    <a:pt x="1718940" y="436840"/>
-                  </a:lnTo>
-                  <a:lnTo>
-                    <a:pt x="1647318" y="444113"/>
-                  </a:lnTo>
-                  <a:lnTo>
-                    <a:pt x="1575695" y="451250"/>
-                  </a:lnTo>
-                  <a:lnTo>
-                    <a:pt x="1504073" y="458256"/>
-                  </a:lnTo>
-                  <a:lnTo>
-                    <a:pt x="1432450" y="465132"/>
-                  </a:lnTo>
-                  <a:lnTo>
-                    <a:pt x="1360827" y="471880"/>
-                  </a:lnTo>
-                  <a:lnTo>
-                    <a:pt x="1289205" y="478503"/>
-                  </a:lnTo>
-                  <a:lnTo>
-                    <a:pt x="1217582" y="485004"/>
-                  </a:lnTo>
-                  <a:lnTo>
-                    <a:pt x="1145960" y="491384"/>
-                  </a:lnTo>
-                  <a:lnTo>
-                    <a:pt x="1074337" y="497646"/>
-                  </a:lnTo>
-                  <a:lnTo>
-                    <a:pt x="1002715" y="503791"/>
-                  </a:lnTo>
-                  <a:lnTo>
-                    <a:pt x="931092" y="509823"/>
-                  </a:lnTo>
-                  <a:lnTo>
-                    <a:pt x="859470" y="515744"/>
-                  </a:lnTo>
-                  <a:lnTo>
-                    <a:pt x="787847" y="521554"/>
-                  </a:lnTo>
-                  <a:lnTo>
-                    <a:pt x="716225" y="527257"/>
-                  </a:lnTo>
-                  <a:lnTo>
-                    <a:pt x="644602" y="532854"/>
-                  </a:lnTo>
-                  <a:lnTo>
-                    <a:pt x="572980" y="538348"/>
-                  </a:lnTo>
-                  <a:lnTo>
-                    <a:pt x="501357" y="543739"/>
-                  </a:lnTo>
-                  <a:lnTo>
-                    <a:pt x="429735" y="549031"/>
-                  </a:lnTo>
-                  <a:lnTo>
-                    <a:pt x="358112" y="554225"/>
-                  </a:lnTo>
-                  <a:lnTo>
-                    <a:pt x="286490" y="559322"/>
-                  </a:lnTo>
-                  <a:lnTo>
-                    <a:pt x="214867" y="564325"/>
-                  </a:lnTo>
-                  <a:lnTo>
-                    <a:pt x="143245" y="569236"/>
-                  </a:lnTo>
-                  <a:lnTo>
-                    <a:pt x="71622" y="574055"/>
-                  </a:lnTo>
-                  <a:lnTo>
-                    <a:pt x="0" y="578785"/>
+                    <a:pt x="4512219" y="14702"/>
+                  </a:lnTo>
+                  <a:lnTo>
+                    <a:pt x="4440596" y="29143"/>
+                  </a:lnTo>
+                  <a:lnTo>
+                    <a:pt x="4368974" y="43328"/>
+                  </a:lnTo>
+                  <a:lnTo>
+                    <a:pt x="4297351" y="57261"/>
+                  </a:lnTo>
+                  <a:lnTo>
+                    <a:pt x="4225729" y="70947"/>
+                  </a:lnTo>
+                  <a:lnTo>
+                    <a:pt x="4154106" y="84391"/>
+                  </a:lnTo>
+                  <a:lnTo>
+                    <a:pt x="4082483" y="97596"/>
+                  </a:lnTo>
+                  <a:lnTo>
+                    <a:pt x="4010861" y="110566"/>
+                  </a:lnTo>
+                  <a:lnTo>
+                    <a:pt x="3939238" y="123307"/>
+                  </a:lnTo>
+                  <a:lnTo>
+                    <a:pt x="3867616" y="135822"/>
+                  </a:lnTo>
+                  <a:lnTo>
+                    <a:pt x="3795993" y="148114"/>
+                  </a:lnTo>
+                  <a:lnTo>
+                    <a:pt x="3724371" y="160189"/>
+                  </a:lnTo>
+                  <a:lnTo>
+                    <a:pt x="3652748" y="172049"/>
+                  </a:lnTo>
+                  <a:lnTo>
+                    <a:pt x="3581126" y="183699"/>
+                  </a:lnTo>
+                  <a:lnTo>
+                    <a:pt x="3509503" y="195142"/>
+                  </a:lnTo>
+                  <a:lnTo>
+                    <a:pt x="3437881" y="206382"/>
+                  </a:lnTo>
+                  <a:lnTo>
+                    <a:pt x="3366258" y="217423"/>
+                  </a:lnTo>
+                  <a:lnTo>
+                    <a:pt x="3294636" y="228268"/>
+                  </a:lnTo>
+                  <a:lnTo>
+                    <a:pt x="3223013" y="238921"/>
+                  </a:lnTo>
+                  <a:lnTo>
+                    <a:pt x="3151391" y="249384"/>
+                  </a:lnTo>
+                  <a:lnTo>
+                    <a:pt x="3079768" y="259662"/>
+                  </a:lnTo>
+                  <a:lnTo>
+                    <a:pt x="3008146" y="269758"/>
+                  </a:lnTo>
+                  <a:lnTo>
+                    <a:pt x="2936523" y="279675"/>
+                  </a:lnTo>
+                  <a:lnTo>
+                    <a:pt x="2864901" y="289415"/>
+                  </a:lnTo>
+                  <a:lnTo>
+                    <a:pt x="2793278" y="298983"/>
+                  </a:lnTo>
+                  <a:lnTo>
+                    <a:pt x="2721655" y="308381"/>
+                  </a:lnTo>
+                  <a:lnTo>
+                    <a:pt x="2650033" y="317613"/>
+                  </a:lnTo>
+                  <a:lnTo>
+                    <a:pt x="2578410" y="326680"/>
+                  </a:lnTo>
+                  <a:lnTo>
+                    <a:pt x="2506788" y="335587"/>
+                  </a:lnTo>
+                  <a:lnTo>
+                    <a:pt x="2435165" y="344336"/>
+                  </a:lnTo>
+                  <a:lnTo>
+                    <a:pt x="2363543" y="352929"/>
+                  </a:lnTo>
+                  <a:lnTo>
+                    <a:pt x="2291920" y="361371"/>
+                  </a:lnTo>
+                  <a:lnTo>
+                    <a:pt x="2220298" y="369662"/>
+                  </a:lnTo>
+                  <a:lnTo>
+                    <a:pt x="2148675" y="377806"/>
+                  </a:lnTo>
+                  <a:lnTo>
+                    <a:pt x="2077053" y="385806"/>
+                  </a:lnTo>
+                  <a:lnTo>
+                    <a:pt x="2005430" y="393664"/>
+                  </a:lnTo>
+                  <a:lnTo>
+                    <a:pt x="1933808" y="401383"/>
+                  </a:lnTo>
+                  <a:lnTo>
+                    <a:pt x="1862185" y="408964"/>
+                  </a:lnTo>
+                  <a:lnTo>
+                    <a:pt x="1790563" y="416411"/>
+                  </a:lnTo>
+                  <a:lnTo>
+                    <a:pt x="1718940" y="423726"/>
+                  </a:lnTo>
+                  <a:lnTo>
+                    <a:pt x="1647318" y="430912"/>
+                  </a:lnTo>
+                  <a:lnTo>
+                    <a:pt x="1575695" y="437969"/>
+                  </a:lnTo>
+                  <a:lnTo>
+                    <a:pt x="1504073" y="444902"/>
+                  </a:lnTo>
+                  <a:lnTo>
+                    <a:pt x="1432450" y="451711"/>
+                  </a:lnTo>
+                  <a:lnTo>
+                    <a:pt x="1360827" y="458400"/>
+                  </a:lnTo>
+                  <a:lnTo>
+                    <a:pt x="1289205" y="464970"/>
+                  </a:lnTo>
+                  <a:lnTo>
+                    <a:pt x="1217582" y="471424"/>
+                  </a:lnTo>
+                  <a:lnTo>
+                    <a:pt x="1145960" y="477763"/>
+                  </a:lnTo>
+                  <a:lnTo>
+                    <a:pt x="1074337" y="483990"/>
+                  </a:lnTo>
+                  <a:lnTo>
+                    <a:pt x="1002715" y="490106"/>
+                  </a:lnTo>
+                  <a:lnTo>
+                    <a:pt x="931092" y="496113"/>
+                  </a:lnTo>
+                  <a:lnTo>
+                    <a:pt x="859470" y="502015"/>
+                  </a:lnTo>
+                  <a:lnTo>
+                    <a:pt x="787847" y="507811"/>
+                  </a:lnTo>
+                  <a:lnTo>
+                    <a:pt x="716225" y="513505"/>
+                  </a:lnTo>
+                  <a:lnTo>
+                    <a:pt x="644602" y="519097"/>
+                  </a:lnTo>
+                  <a:lnTo>
+                    <a:pt x="572980" y="524590"/>
+                  </a:lnTo>
+                  <a:lnTo>
+                    <a:pt x="501357" y="529986"/>
+                  </a:lnTo>
+                  <a:lnTo>
+                    <a:pt x="429735" y="535287"/>
+                  </a:lnTo>
+                  <a:lnTo>
+                    <a:pt x="358112" y="540493"/>
+                  </a:lnTo>
+                  <a:lnTo>
+                    <a:pt x="286490" y="545607"/>
+                  </a:lnTo>
+                  <a:lnTo>
+                    <a:pt x="214867" y="550630"/>
+                  </a:lnTo>
+                  <a:lnTo>
+                    <a:pt x="143245" y="555564"/>
+                  </a:lnTo>
+                  <a:lnTo>
+                    <a:pt x="71622" y="560410"/>
+                  </a:lnTo>
+                  <a:lnTo>
+                    <a:pt x="0" y="565171"/>
                   </a:lnTo>
                 </a:path>
               </a:pathLst>
@@ -4197,309 +4197,309 @@
           </p:nvSpPr>
           <p:spPr>
             <a:xfrm>
-              <a:off x="1172049" y="4660226"/>
-              <a:ext cx="7090630" cy="178248"/>
+              <a:off x="1172049" y="4687720"/>
+              <a:ext cx="7090630" cy="108751"/>
             </a:xfrm>
             <a:custGeom>
               <a:avLst/>
               <a:pathLst>
-                <a:path w="7090630" h="178248">
+                <a:path w="7090630" h="108751">
                   <a:moveTo>
-                    <a:pt x="0" y="178248"/>
+                    <a:pt x="0" y="108751"/>
                   </a:moveTo>
                   <a:lnTo>
-                    <a:pt x="71622" y="176638"/>
-                  </a:lnTo>
-                  <a:lnTo>
-                    <a:pt x="143245" y="175024"/>
-                  </a:lnTo>
-                  <a:lnTo>
-                    <a:pt x="214867" y="173407"/>
-                  </a:lnTo>
-                  <a:lnTo>
-                    <a:pt x="286490" y="171785"/>
-                  </a:lnTo>
-                  <a:lnTo>
-                    <a:pt x="358112" y="170161"/>
-                  </a:lnTo>
-                  <a:lnTo>
-                    <a:pt x="429735" y="168532"/>
-                  </a:lnTo>
-                  <a:lnTo>
-                    <a:pt x="501357" y="166900"/>
-                  </a:lnTo>
-                  <a:lnTo>
-                    <a:pt x="572980" y="165265"/>
-                  </a:lnTo>
-                  <a:lnTo>
-                    <a:pt x="644602" y="163626"/>
-                  </a:lnTo>
-                  <a:lnTo>
-                    <a:pt x="716225" y="161983"/>
-                  </a:lnTo>
-                  <a:lnTo>
-                    <a:pt x="787847" y="160336"/>
-                  </a:lnTo>
-                  <a:lnTo>
-                    <a:pt x="859470" y="158686"/>
-                  </a:lnTo>
-                  <a:lnTo>
-                    <a:pt x="931092" y="157032"/>
-                  </a:lnTo>
-                  <a:lnTo>
-                    <a:pt x="1002715" y="155374"/>
-                  </a:lnTo>
-                  <a:lnTo>
-                    <a:pt x="1074337" y="153712"/>
-                  </a:lnTo>
-                  <a:lnTo>
-                    <a:pt x="1145960" y="152047"/>
-                  </a:lnTo>
-                  <a:lnTo>
-                    <a:pt x="1217582" y="150378"/>
-                  </a:lnTo>
-                  <a:lnTo>
-                    <a:pt x="1289205" y="148706"/>
-                  </a:lnTo>
-                  <a:lnTo>
-                    <a:pt x="1360827" y="147029"/>
-                  </a:lnTo>
-                  <a:lnTo>
-                    <a:pt x="1432450" y="145349"/>
-                  </a:lnTo>
-                  <a:lnTo>
-                    <a:pt x="1504073" y="143665"/>
-                  </a:lnTo>
-                  <a:lnTo>
-                    <a:pt x="1575695" y="141977"/>
-                  </a:lnTo>
-                  <a:lnTo>
-                    <a:pt x="1647318" y="140286"/>
-                  </a:lnTo>
-                  <a:lnTo>
-                    <a:pt x="1718940" y="138591"/>
-                  </a:lnTo>
-                  <a:lnTo>
-                    <a:pt x="1790563" y="136892"/>
-                  </a:lnTo>
-                  <a:lnTo>
-                    <a:pt x="1862185" y="135189"/>
-                  </a:lnTo>
-                  <a:lnTo>
-                    <a:pt x="1933808" y="133482"/>
-                  </a:lnTo>
-                  <a:lnTo>
-                    <a:pt x="2005430" y="131772"/>
-                  </a:lnTo>
-                  <a:lnTo>
-                    <a:pt x="2077053" y="130057"/>
-                  </a:lnTo>
-                  <a:lnTo>
-                    <a:pt x="2148675" y="128339"/>
-                  </a:lnTo>
-                  <a:lnTo>
-                    <a:pt x="2220298" y="126617"/>
-                  </a:lnTo>
-                  <a:lnTo>
-                    <a:pt x="2291920" y="124891"/>
-                  </a:lnTo>
-                  <a:lnTo>
-                    <a:pt x="2363543" y="123161"/>
-                  </a:lnTo>
-                  <a:lnTo>
-                    <a:pt x="2435165" y="121428"/>
-                  </a:lnTo>
-                  <a:lnTo>
-                    <a:pt x="2506788" y="119690"/>
-                  </a:lnTo>
-                  <a:lnTo>
-                    <a:pt x="2578410" y="117949"/>
-                  </a:lnTo>
-                  <a:lnTo>
-                    <a:pt x="2650033" y="116204"/>
-                  </a:lnTo>
-                  <a:lnTo>
-                    <a:pt x="2721655" y="114454"/>
-                  </a:lnTo>
-                  <a:lnTo>
-                    <a:pt x="2793278" y="112701"/>
-                  </a:lnTo>
-                  <a:lnTo>
-                    <a:pt x="2864901" y="110944"/>
-                  </a:lnTo>
-                  <a:lnTo>
-                    <a:pt x="2936523" y="109183"/>
-                  </a:lnTo>
-                  <a:lnTo>
-                    <a:pt x="3008146" y="107418"/>
-                  </a:lnTo>
-                  <a:lnTo>
-                    <a:pt x="3079768" y="105649"/>
-                  </a:lnTo>
-                  <a:lnTo>
-                    <a:pt x="3151391" y="103877"/>
-                  </a:lnTo>
-                  <a:lnTo>
-                    <a:pt x="3223013" y="102100"/>
-                  </a:lnTo>
-                  <a:lnTo>
-                    <a:pt x="3294636" y="100319"/>
-                  </a:lnTo>
-                  <a:lnTo>
-                    <a:pt x="3366258" y="98534"/>
-                  </a:lnTo>
-                  <a:lnTo>
-                    <a:pt x="3437881" y="96745"/>
-                  </a:lnTo>
-                  <a:lnTo>
-                    <a:pt x="3509503" y="94953"/>
-                  </a:lnTo>
-                  <a:lnTo>
-                    <a:pt x="3581126" y="93156"/>
-                  </a:lnTo>
-                  <a:lnTo>
-                    <a:pt x="3652748" y="91355"/>
-                  </a:lnTo>
-                  <a:lnTo>
-                    <a:pt x="3724371" y="89550"/>
-                  </a:lnTo>
-                  <a:lnTo>
-                    <a:pt x="3795993" y="87741"/>
-                  </a:lnTo>
-                  <a:lnTo>
-                    <a:pt x="3867616" y="85928"/>
-                  </a:lnTo>
-                  <a:lnTo>
-                    <a:pt x="3939238" y="84111"/>
-                  </a:lnTo>
-                  <a:lnTo>
-                    <a:pt x="4010861" y="82290"/>
-                  </a:lnTo>
-                  <a:lnTo>
-                    <a:pt x="4082483" y="80465"/>
-                  </a:lnTo>
-                  <a:lnTo>
-                    <a:pt x="4154106" y="78636"/>
-                  </a:lnTo>
-                  <a:lnTo>
-                    <a:pt x="4225729" y="76802"/>
-                  </a:lnTo>
-                  <a:lnTo>
-                    <a:pt x="4297351" y="74965"/>
-                  </a:lnTo>
-                  <a:lnTo>
-                    <a:pt x="4368974" y="73123"/>
-                  </a:lnTo>
-                  <a:lnTo>
-                    <a:pt x="4440596" y="71277"/>
-                  </a:lnTo>
-                  <a:lnTo>
-                    <a:pt x="4512219" y="69428"/>
-                  </a:lnTo>
-                  <a:lnTo>
-                    <a:pt x="4583841" y="67574"/>
-                  </a:lnTo>
-                  <a:lnTo>
-                    <a:pt x="4655464" y="65715"/>
-                  </a:lnTo>
-                  <a:lnTo>
-                    <a:pt x="4727086" y="63853"/>
-                  </a:lnTo>
-                  <a:lnTo>
-                    <a:pt x="4798709" y="61987"/>
-                  </a:lnTo>
-                  <a:lnTo>
-                    <a:pt x="4870331" y="60116"/>
-                  </a:lnTo>
-                  <a:lnTo>
-                    <a:pt x="4941954" y="58241"/>
-                  </a:lnTo>
-                  <a:lnTo>
-                    <a:pt x="5013576" y="56362"/>
-                  </a:lnTo>
-                  <a:lnTo>
-                    <a:pt x="5085199" y="54479"/>
-                  </a:lnTo>
-                  <a:lnTo>
-                    <a:pt x="5156821" y="52591"/>
-                  </a:lnTo>
-                  <a:lnTo>
-                    <a:pt x="5228444" y="50700"/>
-                  </a:lnTo>
-                  <a:lnTo>
-                    <a:pt x="5300066" y="48804"/>
-                  </a:lnTo>
-                  <a:lnTo>
-                    <a:pt x="5371689" y="46904"/>
-                  </a:lnTo>
-                  <a:lnTo>
-                    <a:pt x="5443311" y="44999"/>
-                  </a:lnTo>
-                  <a:lnTo>
-                    <a:pt x="5514934" y="43090"/>
-                  </a:lnTo>
-                  <a:lnTo>
-                    <a:pt x="5586557" y="41177"/>
-                  </a:lnTo>
-                  <a:lnTo>
-                    <a:pt x="5658179" y="39260"/>
-                  </a:lnTo>
-                  <a:lnTo>
-                    <a:pt x="5729802" y="37338"/>
-                  </a:lnTo>
-                  <a:lnTo>
-                    <a:pt x="5801424" y="35413"/>
-                  </a:lnTo>
-                  <a:lnTo>
-                    <a:pt x="5873047" y="33482"/>
-                  </a:lnTo>
-                  <a:lnTo>
-                    <a:pt x="5944669" y="31548"/>
-                  </a:lnTo>
-                  <a:lnTo>
-                    <a:pt x="6016292" y="29609"/>
-                  </a:lnTo>
-                  <a:lnTo>
-                    <a:pt x="6087914" y="27666"/>
-                  </a:lnTo>
-                  <a:lnTo>
-                    <a:pt x="6159537" y="25718"/>
-                  </a:lnTo>
-                  <a:lnTo>
-                    <a:pt x="6231159" y="23766"/>
-                  </a:lnTo>
-                  <a:lnTo>
-                    <a:pt x="6302782" y="21810"/>
-                  </a:lnTo>
-                  <a:lnTo>
-                    <a:pt x="6374404" y="19849"/>
-                  </a:lnTo>
-                  <a:lnTo>
-                    <a:pt x="6446027" y="17884"/>
-                  </a:lnTo>
-                  <a:lnTo>
-                    <a:pt x="6517649" y="15915"/>
-                  </a:lnTo>
-                  <a:lnTo>
-                    <a:pt x="6589272" y="13941"/>
-                  </a:lnTo>
-                  <a:lnTo>
-                    <a:pt x="6660894" y="11963"/>
-                  </a:lnTo>
-                  <a:lnTo>
-                    <a:pt x="6732517" y="9980"/>
-                  </a:lnTo>
-                  <a:lnTo>
-                    <a:pt x="6804139" y="7993"/>
-                  </a:lnTo>
-                  <a:lnTo>
-                    <a:pt x="6875762" y="6001"/>
-                  </a:lnTo>
-                  <a:lnTo>
-                    <a:pt x="6947385" y="4005"/>
-                  </a:lnTo>
-                  <a:lnTo>
-                    <a:pt x="7019007" y="2005"/>
+                    <a:pt x="71622" y="107724"/>
+                  </a:lnTo>
+                  <a:lnTo>
+                    <a:pt x="143245" y="106695"/>
+                  </a:lnTo>
+                  <a:lnTo>
+                    <a:pt x="214867" y="105665"/>
+                  </a:lnTo>
+                  <a:lnTo>
+                    <a:pt x="286490" y="104633"/>
+                  </a:lnTo>
+                  <a:lnTo>
+                    <a:pt x="358112" y="103600"/>
+                  </a:lnTo>
+                  <a:lnTo>
+                    <a:pt x="429735" y="102566"/>
+                  </a:lnTo>
+                  <a:lnTo>
+                    <a:pt x="501357" y="101530"/>
+                  </a:lnTo>
+                  <a:lnTo>
+                    <a:pt x="572980" y="100493"/>
+                  </a:lnTo>
+                  <a:lnTo>
+                    <a:pt x="644602" y="99454"/>
+                  </a:lnTo>
+                  <a:lnTo>
+                    <a:pt x="716225" y="98414"/>
+                  </a:lnTo>
+                  <a:lnTo>
+                    <a:pt x="787847" y="97373"/>
+                  </a:lnTo>
+                  <a:lnTo>
+                    <a:pt x="859470" y="96330"/>
+                  </a:lnTo>
+                  <a:lnTo>
+                    <a:pt x="931092" y="95286"/>
+                  </a:lnTo>
+                  <a:lnTo>
+                    <a:pt x="1002715" y="94240"/>
+                  </a:lnTo>
+                  <a:lnTo>
+                    <a:pt x="1074337" y="93193"/>
+                  </a:lnTo>
+                  <a:lnTo>
+                    <a:pt x="1145960" y="92145"/>
+                  </a:lnTo>
+                  <a:lnTo>
+                    <a:pt x="1217582" y="91095"/>
+                  </a:lnTo>
+                  <a:lnTo>
+                    <a:pt x="1289205" y="90044"/>
+                  </a:lnTo>
+                  <a:lnTo>
+                    <a:pt x="1360827" y="88991"/>
+                  </a:lnTo>
+                  <a:lnTo>
+                    <a:pt x="1432450" y="87937"/>
+                  </a:lnTo>
+                  <a:lnTo>
+                    <a:pt x="1504073" y="86881"/>
+                  </a:lnTo>
+                  <a:lnTo>
+                    <a:pt x="1575695" y="85824"/>
+                  </a:lnTo>
+                  <a:lnTo>
+                    <a:pt x="1647318" y="84766"/>
+                  </a:lnTo>
+                  <a:lnTo>
+                    <a:pt x="1718940" y="83706"/>
+                  </a:lnTo>
+                  <a:lnTo>
+                    <a:pt x="1790563" y="82645"/>
+                  </a:lnTo>
+                  <a:lnTo>
+                    <a:pt x="1862185" y="81582"/>
+                  </a:lnTo>
+                  <a:lnTo>
+                    <a:pt x="1933808" y="80518"/>
+                  </a:lnTo>
+                  <a:lnTo>
+                    <a:pt x="2005430" y="79452"/>
+                  </a:lnTo>
+                  <a:lnTo>
+                    <a:pt x="2077053" y="78385"/>
+                  </a:lnTo>
+                  <a:lnTo>
+                    <a:pt x="2148675" y="77317"/>
+                  </a:lnTo>
+                  <a:lnTo>
+                    <a:pt x="2220298" y="76247"/>
+                  </a:lnTo>
+                  <a:lnTo>
+                    <a:pt x="2291920" y="75176"/>
+                  </a:lnTo>
+                  <a:lnTo>
+                    <a:pt x="2363543" y="74103"/>
+                  </a:lnTo>
+                  <a:lnTo>
+                    <a:pt x="2435165" y="73029"/>
+                  </a:lnTo>
+                  <a:lnTo>
+                    <a:pt x="2506788" y="71953"/>
+                  </a:lnTo>
+                  <a:lnTo>
+                    <a:pt x="2578410" y="70876"/>
+                  </a:lnTo>
+                  <a:lnTo>
+                    <a:pt x="2650033" y="69797"/>
+                  </a:lnTo>
+                  <a:lnTo>
+                    <a:pt x="2721655" y="68717"/>
+                  </a:lnTo>
+                  <a:lnTo>
+                    <a:pt x="2793278" y="67636"/>
+                  </a:lnTo>
+                  <a:lnTo>
+                    <a:pt x="2864901" y="66553"/>
+                  </a:lnTo>
+                  <a:lnTo>
+                    <a:pt x="2936523" y="65468"/>
+                  </a:lnTo>
+                  <a:lnTo>
+                    <a:pt x="3008146" y="64382"/>
+                  </a:lnTo>
+                  <a:lnTo>
+                    <a:pt x="3079768" y="63295"/>
+                  </a:lnTo>
+                  <a:lnTo>
+                    <a:pt x="3151391" y="62206"/>
+                  </a:lnTo>
+                  <a:lnTo>
+                    <a:pt x="3223013" y="61116"/>
+                  </a:lnTo>
+                  <a:lnTo>
+                    <a:pt x="3294636" y="60024"/>
+                  </a:lnTo>
+                  <a:lnTo>
+                    <a:pt x="3366258" y="58931"/>
+                  </a:lnTo>
+                  <a:lnTo>
+                    <a:pt x="3437881" y="57836"/>
+                  </a:lnTo>
+                  <a:lnTo>
+                    <a:pt x="3509503" y="56740"/>
+                  </a:lnTo>
+                  <a:lnTo>
+                    <a:pt x="3581126" y="55642"/>
+                  </a:lnTo>
+                  <a:lnTo>
+                    <a:pt x="3652748" y="54543"/>
+                  </a:lnTo>
+                  <a:lnTo>
+                    <a:pt x="3724371" y="53442"/>
+                  </a:lnTo>
+                  <a:lnTo>
+                    <a:pt x="3795993" y="52340"/>
+                  </a:lnTo>
+                  <a:lnTo>
+                    <a:pt x="3867616" y="51236"/>
+                  </a:lnTo>
+                  <a:lnTo>
+                    <a:pt x="3939238" y="50131"/>
+                  </a:lnTo>
+                  <a:lnTo>
+                    <a:pt x="4010861" y="49025"/>
+                  </a:lnTo>
+                  <a:lnTo>
+                    <a:pt x="4082483" y="47917"/>
+                  </a:lnTo>
+                  <a:lnTo>
+                    <a:pt x="4154106" y="46807"/>
+                  </a:lnTo>
+                  <a:lnTo>
+                    <a:pt x="4225729" y="45696"/>
+                  </a:lnTo>
+                  <a:lnTo>
+                    <a:pt x="4297351" y="44583"/>
+                  </a:lnTo>
+                  <a:lnTo>
+                    <a:pt x="4368974" y="43469"/>
+                  </a:lnTo>
+                  <a:lnTo>
+                    <a:pt x="4440596" y="42354"/>
+                  </a:lnTo>
+                  <a:lnTo>
+                    <a:pt x="4512219" y="41237"/>
+                  </a:lnTo>
+                  <a:lnTo>
+                    <a:pt x="4583841" y="40118"/>
+                  </a:lnTo>
+                  <a:lnTo>
+                    <a:pt x="4655464" y="38998"/>
+                  </a:lnTo>
+                  <a:lnTo>
+                    <a:pt x="4727086" y="37876"/>
+                  </a:lnTo>
+                  <a:lnTo>
+                    <a:pt x="4798709" y="36753"/>
+                  </a:lnTo>
+                  <a:lnTo>
+                    <a:pt x="4870331" y="35628"/>
+                  </a:lnTo>
+                  <a:lnTo>
+                    <a:pt x="4941954" y="34502"/>
+                  </a:lnTo>
+                  <a:lnTo>
+                    <a:pt x="5013576" y="33374"/>
+                  </a:lnTo>
+                  <a:lnTo>
+                    <a:pt x="5085199" y="32245"/>
+                  </a:lnTo>
+                  <a:lnTo>
+                    <a:pt x="5156821" y="31114"/>
+                  </a:lnTo>
+                  <a:lnTo>
+                    <a:pt x="5228444" y="29982"/>
+                  </a:lnTo>
+                  <a:lnTo>
+                    <a:pt x="5300066" y="28848"/>
+                  </a:lnTo>
+                  <a:lnTo>
+                    <a:pt x="5371689" y="27713"/>
+                  </a:lnTo>
+                  <a:lnTo>
+                    <a:pt x="5443311" y="26576"/>
+                  </a:lnTo>
+                  <a:lnTo>
+                    <a:pt x="5514934" y="25438"/>
+                  </a:lnTo>
+                  <a:lnTo>
+                    <a:pt x="5586557" y="24298"/>
+                  </a:lnTo>
+                  <a:lnTo>
+                    <a:pt x="5658179" y="23156"/>
+                  </a:lnTo>
+                  <a:lnTo>
+                    <a:pt x="5729802" y="22013"/>
+                  </a:lnTo>
+                  <a:lnTo>
+                    <a:pt x="5801424" y="20868"/>
+                  </a:lnTo>
+                  <a:lnTo>
+                    <a:pt x="5873047" y="19722"/>
+                  </a:lnTo>
+                  <a:lnTo>
+                    <a:pt x="5944669" y="18575"/>
+                  </a:lnTo>
+                  <a:lnTo>
+                    <a:pt x="6016292" y="17425"/>
+                  </a:lnTo>
+                  <a:lnTo>
+                    <a:pt x="6087914" y="16275"/>
+                  </a:lnTo>
+                  <a:lnTo>
+                    <a:pt x="6159537" y="15122"/>
+                  </a:lnTo>
+                  <a:lnTo>
+                    <a:pt x="6231159" y="13968"/>
+                  </a:lnTo>
+                  <a:lnTo>
+                    <a:pt x="6302782" y="12813"/>
+                  </a:lnTo>
+                  <a:lnTo>
+                    <a:pt x="6374404" y="11656"/>
+                  </a:lnTo>
+                  <a:lnTo>
+                    <a:pt x="6446027" y="10497"/>
+                  </a:lnTo>
+                  <a:lnTo>
+                    <a:pt x="6517649" y="9337"/>
+                  </a:lnTo>
+                  <a:lnTo>
+                    <a:pt x="6589272" y="8175"/>
+                  </a:lnTo>
+                  <a:lnTo>
+                    <a:pt x="6660894" y="7012"/>
+                  </a:lnTo>
+                  <a:lnTo>
+                    <a:pt x="6732517" y="5847"/>
+                  </a:lnTo>
+                  <a:lnTo>
+                    <a:pt x="6804139" y="4681"/>
+                  </a:lnTo>
+                  <a:lnTo>
+                    <a:pt x="6875762" y="3513"/>
+                  </a:lnTo>
+                  <a:lnTo>
+                    <a:pt x="6947385" y="2343"/>
+                  </a:lnTo>
+                  <a:lnTo>
+                    <a:pt x="7019007" y="1172"/>
                   </a:lnTo>
                   <a:lnTo>
                     <a:pt x="7090630" y="0"/>
@@ -4574,7 +4574,7 @@
           </p:nvSpPr>
           <p:spPr>
             <a:xfrm>
-              <a:off x="5756448" y="2073503"/>
+              <a:off x="5759271" y="2073503"/>
               <a:ext cx="0" cy="3649639"/>
             </a:xfrm>
             <a:custGeom>
@@ -4617,7 +4617,7 @@
           </p:nvSpPr>
           <p:spPr>
             <a:xfrm>
-              <a:off x="4469314" y="2073503"/>
+              <a:off x="4504692" y="2073503"/>
               <a:ext cx="0" cy="3649639"/>
             </a:xfrm>
             <a:custGeom>
@@ -4660,7 +4660,7 @@
           </p:nvSpPr>
           <p:spPr>
             <a:xfrm>
-              <a:off x="6872676" y="2073503"/>
+              <a:off x="6871070" y="2073503"/>
               <a:ext cx="0" cy="3649639"/>
             </a:xfrm>
             <a:custGeom>
@@ -4933,7 +4933,7 @@
           </p:nvSpPr>
           <p:spPr>
             <a:xfrm>
-              <a:off x="3199861" y="5785772"/>
+              <a:off x="3201825" y="5785772"/>
               <a:ext cx="161574" cy="80101"/>
             </a:xfrm>
             <a:prstGeom prst="rect">
@@ -4979,7 +4979,7 @@
           </p:nvSpPr>
           <p:spPr>
             <a:xfrm>
-              <a:off x="5730225" y="5785772"/>
+              <a:off x="5727471" y="5785772"/>
               <a:ext cx="62179" cy="80101"/>
             </a:xfrm>
             <a:prstGeom prst="rect">
@@ -5025,7 +5025,7 @@
           </p:nvSpPr>
           <p:spPr>
             <a:xfrm>
-              <a:off x="8179802" y="5785772"/>
+              <a:off x="8172329" y="5785772"/>
               <a:ext cx="124358" cy="80101"/>
             </a:xfrm>
             <a:prstGeom prst="rect">
@@ -5196,7 +5196,7 @@
                   <a:latin typeface="Helvetica"/>
                   <a:cs typeface="Helvetica"/>
                 </a:rPr>
-                <a:t>subHR per 10 mL/min decline: 0.97 (0.77-1.22), p_Bonf = 1.000 (n = 6)  |  per IQR decline (Δ = 24.2): 0.93 (0.53-1.61)  |  IQR: [-13.0, 11.2]</a:t>
+                <a:t>subHR per 10 mL/min decline: 0.98 (0.78-1.23), p_Bonf = 1.000 (n = 6)  |  per IQR decline (Δ = 23.9): 0.96 (0.55-1.65)  |  IQR: [-12.7, 11.2]</a:t>
               </a:r>
             </a:p>
           </p:txBody>
